--- a/assets/Kavach_IIC3_deck_v2.pptx
+++ b/assets/Kavach_IIC3_deck_v2.pptx
@@ -11427,7 +11427,7 @@
                 <a:cs typeface="Poppins Light"/>
                 <a:sym typeface="Poppins Light"/>
               </a:rPr>
-              <a:t>Kavach — India's First Anti-Digital-Arrest Shield</a:t>
+              <a:t>Kavach - India's First Anti-Digital-Arrest Shield</a:t>
             </a:r>
             <a:endParaRPr dirty="0"/>
           </a:p>
@@ -11490,7 +11490,7 @@
                 <a:cs typeface="Poppins Light"/>
                 <a:sym typeface="Poppins Light"/>
               </a:rPr>
-              <a:t>Team Name: {{TEAM_NAME}}</a:t>
+              <a:t>Team Name: 511</a:t>
             </a:r>
             <a:endParaRPr dirty="0"/>
           </a:p>
@@ -11682,7 +11682,1727 @@
 </p:sld>
 </file>
 
-<file path=ppt/slides/slide10.xml><?xml version="1.0" encoding="utf-8"?>
+<file path=ppt/slides/slide2.xml><?xml version="1.0" encoding="utf-8"?>
+<p:sld xmlns:a="http://schemas.openxmlformats.org/drawingml/2006/main" xmlns:r="http://schemas.openxmlformats.org/officeDocument/2006/relationships" xmlns:p="http://schemas.openxmlformats.org/presentationml/2006/main">
+  <p:cSld>
+    <p:spTree>
+      <p:nvGrpSpPr>
+        <p:cNvPr id="1" name="Shape 97"/>
+        <p:cNvGrpSpPr/>
+        <p:nvPr/>
+      </p:nvGrpSpPr>
+      <p:grpSpPr>
+        <a:xfrm>
+          <a:off x="0" y="0"/>
+          <a:ext cx="0" cy="0"/>
+          <a:chOff x="0" y="0"/>
+          <a:chExt cx="0" cy="0"/>
+        </a:xfrm>
+      </p:grpSpPr>
+      <p:pic>
+        <p:nvPicPr>
+          <p:cNvPr id="10" name="Google Shape;84;p13_r1_r25" descr="image.png">
+            <a:extLst>
+              <a:ext uri="{FF2B5EF4-FFF2-40B4-BE49-F238E27FC236}">
+                <a16:creationId xmlns:a16="http://schemas.microsoft.com/office/drawing/2014/main" id="{A7427FBB-6B82-28C2-C807-6A3DF49A1F1A}"/>
+              </a:ext>
+            </a:extLst>
+          </p:cNvPr>
+          <p:cNvPicPr preferRelativeResize="0"/>
+          <p:nvPr/>
+        </p:nvPicPr>
+        <p:blipFill rotWithShape="1">
+          <a:blip r:embed="rId3">
+            <a:alphaModFix/>
+          </a:blip>
+          <a:srcRect/>
+          <a:stretch/>
+        </p:blipFill>
+        <p:spPr>
+          <a:xfrm>
+            <a:off x="-157315" y="-88489"/>
+            <a:ext cx="12457469" cy="7007326"/>
+          </a:xfrm>
+          <a:prstGeom prst="rect">
+            <a:avLst/>
+          </a:prstGeom>
+          <a:noFill/>
+          <a:ln>
+            <a:noFill/>
+          </a:ln>
+        </p:spPr>
+      </p:pic>
+      <p:pic>
+        <p:nvPicPr>
+          <p:cNvPr id="99" name="Google Shape;98;p14_r2_r26" descr="image.png"/>
+          <p:cNvPicPr preferRelativeResize="0"/>
+          <p:nvPr/>
+        </p:nvPicPr>
+        <p:blipFill rotWithShape="1">
+          <a:blip r:embed="rId4">
+            <a:alphaModFix amt="50000"/>
+          </a:blip>
+          <a:srcRect/>
+          <a:stretch/>
+        </p:blipFill>
+        <p:spPr>
+          <a:xfrm>
+            <a:off x="0" y="0"/>
+            <a:ext cx="12192000" cy="6858000"/>
+          </a:xfrm>
+          <a:prstGeom prst="rect">
+            <a:avLst/>
+          </a:prstGeom>
+          <a:noFill/>
+          <a:ln>
+            <a:noFill/>
+          </a:ln>
+        </p:spPr>
+      </p:pic>
+      <p:grpSp>
+        <p:nvGrpSpPr>
+          <p:cNvPr id="11" name="Group 2_r3_r27">
+            <a:extLst>
+              <a:ext uri="{FF2B5EF4-FFF2-40B4-BE49-F238E27FC236}">
+                <a16:creationId xmlns:a16="http://schemas.microsoft.com/office/drawing/2014/main" id="{A73E524B-A1B2-0008-AF1C-66E70946F0B4}"/>
+              </a:ext>
+            </a:extLst>
+          </p:cNvPr>
+          <p:cNvGrpSpPr/>
+          <p:nvPr/>
+        </p:nvGrpSpPr>
+        <p:grpSpPr>
+          <a:xfrm>
+            <a:off x="571500" y="2658491"/>
+            <a:ext cx="10977715" cy="380873"/>
+            <a:chOff x="571500" y="2719451"/>
+            <a:chExt cx="10977715" cy="380873"/>
+          </a:xfrm>
+        </p:grpSpPr>
+        <p:sp>
+          <p:nvSpPr>
+            <p:cNvPr id="100" name="Google Shape;100;p14_r4"/>
+            <p:cNvSpPr txBox="1"/>
+            <p:nvPr/>
+          </p:nvSpPr>
+          <p:spPr>
+            <a:xfrm>
+              <a:off x="928840" y="2719451"/>
+              <a:ext cx="10620375" cy="380873"/>
+            </a:xfrm>
+            <a:prstGeom prst="rect">
+              <a:avLst/>
+            </a:prstGeom>
+            <a:noFill/>
+            <a:ln>
+              <a:noFill/>
+            </a:ln>
+          </p:spPr>
+          <p:txBody>
+            <a:bodyPr spcFirstLastPara="1" wrap="square" lIns="0" tIns="0" rIns="0" bIns="0" anchor="t" anchorCtr="0">
+              <a:spAutoFit/>
+            </a:bodyPr>
+            <a:lstStyle/>
+            <a:p>
+              <a:pPr marL="0" marR="0" lvl="0" indent="0" algn="l" rtl="0">
+                <a:lnSpc>
+                  <a:spcPct val="150000"/>
+                </a:lnSpc>
+                <a:spcBef>
+                  <a:spcPts val="0"/>
+                </a:spcBef>
+                <a:spcAft>
+                  <a:spcPts val="0"/>
+                </a:spcAft>
+                <a:buNone/>
+              </a:pPr>
+              <a:r>
+                <a:rPr lang="en-US" sz="1650" b="0" i="0" u="none" strike="noStrike" cap="none" dirty="0">
+                  <a:solidFill>
+                    <a:srgbClr val="FFFFFF"/>
+                  </a:solidFill>
+                  <a:latin typeface="Poppins Light"/>
+                  <a:ea typeface="Poppins Light"/>
+                  <a:cs typeface="Poppins Light"/>
+                  <a:sym typeface="Poppins Light"/>
+                </a:rPr>
+                <a:t>DIGITAL ARREST IS INDIA'S FASTEST-GROWING FRAUD -</a:t>
+              </a:r>
+              <a:endParaRPr dirty="0"/>
+            </a:p>
+            <a:p>
+              <a:r>
+                <a:rPr>
+                  <a:solidFill>
+                    <a:srgbClr val="FFFFFF"/>
+                  </a:solidFill>
+                </a:rPr>
+                <a:t>AND ELDERS ARE THE TARGET</a:t>
+              </a:r>
+            </a:p>
+          </p:txBody>
+        </p:sp>
+        <p:pic>
+          <p:nvPicPr>
+            <p:cNvPr id="105" name="Google Shape;105;p14_r5" descr="image.png"/>
+            <p:cNvPicPr preferRelativeResize="0"/>
+            <p:nvPr/>
+          </p:nvPicPr>
+          <p:blipFill rotWithShape="1">
+            <a:blip r:embed="rId5">
+              <a:alphaModFix/>
+            </a:blip>
+            <a:srcRect/>
+            <a:stretch/>
+          </p:blipFill>
+          <p:spPr>
+            <a:xfrm>
+              <a:off x="571500" y="2819400"/>
+              <a:ext cx="200025" cy="247650"/>
+            </a:xfrm>
+            <a:prstGeom prst="rect">
+              <a:avLst/>
+            </a:prstGeom>
+            <a:noFill/>
+            <a:ln>
+              <a:noFill/>
+            </a:ln>
+          </p:spPr>
+        </p:pic>
+      </p:grpSp>
+      <p:grpSp>
+        <p:nvGrpSpPr>
+          <p:cNvPr id="12" name="Group 3_r6_r28">
+            <a:extLst>
+              <a:ext uri="{FF2B5EF4-FFF2-40B4-BE49-F238E27FC236}">
+                <a16:creationId xmlns:a16="http://schemas.microsoft.com/office/drawing/2014/main" id="{8BDCEEF2-B973-65CB-4419-90818D61867D}"/>
+              </a:ext>
+            </a:extLst>
+          </p:cNvPr>
+          <p:cNvGrpSpPr/>
+          <p:nvPr/>
+        </p:nvGrpSpPr>
+        <p:grpSpPr>
+          <a:xfrm>
+            <a:off x="571500" y="3188813"/>
+            <a:ext cx="5238750" cy="314325"/>
+            <a:chOff x="571500" y="3657600"/>
+            <a:chExt cx="5238750" cy="314325"/>
+          </a:xfrm>
+        </p:grpSpPr>
+        <p:sp>
+          <p:nvSpPr>
+            <p:cNvPr id="101" name="Google Shape;101;p14_r7"/>
+            <p:cNvSpPr txBox="1"/>
+            <p:nvPr/>
+          </p:nvSpPr>
+          <p:spPr>
+            <a:xfrm>
+              <a:off x="1000125" y="3657600"/>
+              <a:ext cx="4810125" cy="314325"/>
+            </a:xfrm>
+            <a:prstGeom prst="rect">
+              <a:avLst/>
+            </a:prstGeom>
+            <a:noFill/>
+            <a:ln>
+              <a:noFill/>
+            </a:ln>
+          </p:spPr>
+          <p:txBody>
+            <a:bodyPr spcFirstLastPara="1" wrap="square" lIns="0" tIns="0" rIns="0" bIns="0" anchor="t" anchorCtr="0">
+              <a:spAutoFit/>
+            </a:bodyPr>
+            <a:lstStyle/>
+            <a:p>
+              <a:pPr marL="0" marR="0" lvl="0" indent="0" algn="l" rtl="0">
+                <a:lnSpc>
+                  <a:spcPct val="150000"/>
+                </a:lnSpc>
+                <a:spcBef>
+                  <a:spcPts val="0"/>
+                </a:spcBef>
+                <a:spcAft>
+                  <a:spcPts val="0"/>
+                </a:spcAft>
+                <a:buNone/>
+              </a:pPr>
+              <a:r>
+                <a:rPr lang="en-US" sz="1650" b="0" i="0" u="none" strike="noStrike" cap="none" dirty="0">
+                  <a:solidFill>
+                    <a:srgbClr val="FFFFFF"/>
+                  </a:solidFill>
+                  <a:latin typeface="Poppins Light"/>
+                  <a:ea typeface="Poppins Light"/>
+                  <a:cs typeface="Poppins Light"/>
+                  <a:sym typeface="Poppins Light"/>
+                </a:rPr>
+                <a:t>₹4,057.7 crore lost · 297,727 complaints (2022–May 2026)</a:t>
+              </a:r>
+              <a:endParaRPr dirty="0"/>
+            </a:p>
+          </p:txBody>
+        </p:sp>
+        <p:pic>
+          <p:nvPicPr>
+            <p:cNvPr id="106" name="Google Shape;106;p14_r8" descr="image.png"/>
+            <p:cNvPicPr preferRelativeResize="0"/>
+            <p:nvPr/>
+          </p:nvPicPr>
+          <p:blipFill rotWithShape="1">
+            <a:blip r:embed="rId5">
+              <a:alphaModFix/>
+            </a:blip>
+            <a:srcRect/>
+            <a:stretch/>
+          </p:blipFill>
+          <p:spPr>
+            <a:xfrm>
+              <a:off x="571500" y="3686175"/>
+              <a:ext cx="200025" cy="247650"/>
+            </a:xfrm>
+            <a:prstGeom prst="rect">
+              <a:avLst/>
+            </a:prstGeom>
+            <a:noFill/>
+            <a:ln>
+              <a:noFill/>
+            </a:ln>
+          </p:spPr>
+        </p:pic>
+      </p:grpSp>
+      <p:grpSp>
+        <p:nvGrpSpPr>
+          <p:cNvPr id="13" name="Group 4_r9_r29">
+            <a:extLst>
+              <a:ext uri="{FF2B5EF4-FFF2-40B4-BE49-F238E27FC236}">
+                <a16:creationId xmlns:a16="http://schemas.microsoft.com/office/drawing/2014/main" id="{776B38BC-4A69-5F43-A0F5-137CD55E4FA8}"/>
+              </a:ext>
+            </a:extLst>
+          </p:cNvPr>
+          <p:cNvGrpSpPr/>
+          <p:nvPr/>
+        </p:nvGrpSpPr>
+        <p:grpSpPr>
+          <a:xfrm>
+            <a:off x="571500" y="3741263"/>
+            <a:ext cx="5238750" cy="314325"/>
+            <a:chOff x="571500" y="4210050"/>
+            <a:chExt cx="5238750" cy="314325"/>
+          </a:xfrm>
+        </p:grpSpPr>
+        <p:sp>
+          <p:nvSpPr>
+            <p:cNvPr id="102" name="Google Shape;102;p14_r10"/>
+            <p:cNvSpPr txBox="1"/>
+            <p:nvPr/>
+          </p:nvSpPr>
+          <p:spPr>
+            <a:xfrm>
+              <a:off x="1000125" y="4210050"/>
+              <a:ext cx="4810125" cy="314325"/>
+            </a:xfrm>
+            <a:prstGeom prst="rect">
+              <a:avLst/>
+            </a:prstGeom>
+            <a:noFill/>
+            <a:ln>
+              <a:noFill/>
+            </a:ln>
+          </p:spPr>
+          <p:txBody>
+            <a:bodyPr spcFirstLastPara="1" wrap="square" lIns="0" tIns="0" rIns="0" bIns="0" anchor="t" anchorCtr="0">
+              <a:spAutoFit/>
+            </a:bodyPr>
+            <a:lstStyle/>
+            <a:p>
+              <a:pPr marL="0" marR="0" lvl="0" indent="0" algn="l" rtl="0">
+                <a:lnSpc>
+                  <a:spcPct val="150000"/>
+                </a:lnSpc>
+                <a:spcBef>
+                  <a:spcPts val="0"/>
+                </a:spcBef>
+                <a:spcAft>
+                  <a:spcPts val="0"/>
+                </a:spcAft>
+                <a:buNone/>
+              </a:pPr>
+              <a:r>
+                <a:rPr lang="en-US" sz="1650" b="0" i="0" u="none" strike="noStrike" cap="none" dirty="0">
+                  <a:solidFill>
+                    <a:srgbClr val="FFFFFF"/>
+                  </a:solidFill>
+                  <a:latin typeface="Poppins Light"/>
+                  <a:ea typeface="Poppins Light"/>
+                  <a:cs typeface="Poppins Light"/>
+                  <a:sym typeface="Poppins Light"/>
+                </a:rPr>
+                <a:t>Fake 'CBI / TRAI / ED' calls: victim isolated, coerced to pay</a:t>
+              </a:r>
+              <a:endParaRPr dirty="0"/>
+            </a:p>
+          </p:txBody>
+        </p:sp>
+        <p:pic>
+          <p:nvPicPr>
+            <p:cNvPr id="107" name="Google Shape;107;p14_r11" descr="image.png"/>
+            <p:cNvPicPr preferRelativeResize="0"/>
+            <p:nvPr/>
+          </p:nvPicPr>
+          <p:blipFill rotWithShape="1">
+            <a:blip r:embed="rId5">
+              <a:alphaModFix/>
+            </a:blip>
+            <a:srcRect/>
+            <a:stretch/>
+          </p:blipFill>
+          <p:spPr>
+            <a:xfrm>
+              <a:off x="571500" y="4238625"/>
+              <a:ext cx="200025" cy="247650"/>
+            </a:xfrm>
+            <a:prstGeom prst="rect">
+              <a:avLst/>
+            </a:prstGeom>
+            <a:noFill/>
+            <a:ln>
+              <a:noFill/>
+            </a:ln>
+          </p:spPr>
+        </p:pic>
+      </p:grpSp>
+      <p:grpSp>
+        <p:nvGrpSpPr>
+          <p:cNvPr id="14" name="Group 5_r12_r30">
+            <a:extLst>
+              <a:ext uri="{FF2B5EF4-FFF2-40B4-BE49-F238E27FC236}">
+                <a16:creationId xmlns:a16="http://schemas.microsoft.com/office/drawing/2014/main" id="{CF6956BC-D0DD-126D-0DC6-421091A25E5A}"/>
+              </a:ext>
+            </a:extLst>
+          </p:cNvPr>
+          <p:cNvGrpSpPr/>
+          <p:nvPr/>
+        </p:nvGrpSpPr>
+        <p:grpSpPr>
+          <a:xfrm>
+            <a:off x="571500" y="4293713"/>
+            <a:ext cx="5238750" cy="314325"/>
+            <a:chOff x="571500" y="4762500"/>
+            <a:chExt cx="5238750" cy="314325"/>
+          </a:xfrm>
+        </p:grpSpPr>
+        <p:sp>
+          <p:nvSpPr>
+            <p:cNvPr id="103" name="Google Shape;103;p14_r13"/>
+            <p:cNvSpPr txBox="1"/>
+            <p:nvPr/>
+          </p:nvSpPr>
+          <p:spPr>
+            <a:xfrm>
+              <a:off x="1000125" y="4762500"/>
+              <a:ext cx="4810125" cy="314325"/>
+            </a:xfrm>
+            <a:prstGeom prst="rect">
+              <a:avLst/>
+            </a:prstGeom>
+            <a:noFill/>
+            <a:ln>
+              <a:noFill/>
+            </a:ln>
+          </p:spPr>
+          <p:txBody>
+            <a:bodyPr spcFirstLastPara="1" wrap="square" lIns="0" tIns="0" rIns="0" bIns="0" anchor="t" anchorCtr="0">
+              <a:spAutoFit/>
+            </a:bodyPr>
+            <a:lstStyle/>
+            <a:p>
+              <a:pPr marL="0" marR="0" lvl="0" indent="0" algn="l" rtl="0">
+                <a:lnSpc>
+                  <a:spcPct val="150000"/>
+                </a:lnSpc>
+                <a:spcBef>
+                  <a:spcPts val="0"/>
+                </a:spcBef>
+                <a:spcAft>
+                  <a:spcPts val="0"/>
+                </a:spcAft>
+                <a:buNone/>
+              </a:pPr>
+              <a:r>
+                <a:rPr lang="en-US" sz="1650" b="0" i="0" u="none" strike="noStrike" cap="none" dirty="0">
+                  <a:solidFill>
+                    <a:srgbClr val="FFFFFF"/>
+                  </a:solidFill>
+                  <a:latin typeface="Poppins Light"/>
+                  <a:ea typeface="Poppins Light"/>
+                  <a:cs typeface="Poppins Light"/>
+                  <a:sym typeface="Poppins Light"/>
+                </a:rPr>
+                <a:t>Elders = primary targets - fear + obedience exploited</a:t>
+              </a:r>
+              <a:endParaRPr dirty="0"/>
+            </a:p>
+          </p:txBody>
+        </p:sp>
+        <p:pic>
+          <p:nvPicPr>
+            <p:cNvPr id="108" name="Google Shape;108;p14_r14" descr="image.png"/>
+            <p:cNvPicPr preferRelativeResize="0"/>
+            <p:nvPr/>
+          </p:nvPicPr>
+          <p:blipFill rotWithShape="1">
+            <a:blip r:embed="rId5">
+              <a:alphaModFix/>
+            </a:blip>
+            <a:srcRect/>
+            <a:stretch/>
+          </p:blipFill>
+          <p:spPr>
+            <a:xfrm>
+              <a:off x="571500" y="4791075"/>
+              <a:ext cx="200025" cy="247650"/>
+            </a:xfrm>
+            <a:prstGeom prst="rect">
+              <a:avLst/>
+            </a:prstGeom>
+            <a:noFill/>
+            <a:ln>
+              <a:noFill/>
+            </a:ln>
+          </p:spPr>
+        </p:pic>
+      </p:grpSp>
+      <p:sp>
+        <p:nvSpPr>
+          <p:cNvPr id="115" name="Google Shape;109;p14_r15_r31"/>
+          <p:cNvSpPr txBox="1"/>
+          <p:nvPr/>
+        </p:nvSpPr>
+        <p:spPr>
+          <a:xfrm>
+            <a:off x="571500" y="571500"/>
+            <a:ext cx="11601450" cy="628650"/>
+          </a:xfrm>
+          <a:prstGeom prst="rect">
+            <a:avLst/>
+          </a:prstGeom>
+          <a:noFill/>
+          <a:ln>
+            <a:noFill/>
+          </a:ln>
+        </p:spPr>
+        <p:txBody>
+          <a:bodyPr spcFirstLastPara="1" wrap="square" lIns="0" tIns="0" rIns="0" bIns="0" anchor="t" anchorCtr="0">
+            <a:spAutoFit/>
+          </a:bodyPr>
+          <a:lstStyle/>
+          <a:p>
+            <a:pPr marL="0" marR="0" lvl="0" indent="0" algn="l" rtl="0">
+              <a:spcBef>
+                <a:spcPts val="0"/>
+              </a:spcBef>
+              <a:spcAft>
+                <a:spcPts val="0"/>
+              </a:spcAft>
+              <a:buNone/>
+            </a:pPr>
+            <a:r>
+              <a:rPr lang="en-US" sz="3600" b="1" i="0" u="none" strike="noStrike" cap="none" dirty="0">
+                <a:solidFill>
+                  <a:srgbClr val="F2EEFA"/>
+                </a:solidFill>
+                <a:latin typeface="Playfair Display"/>
+                <a:ea typeface="Playfair Display"/>
+                <a:cs typeface="Playfair Display"/>
+                <a:sym typeface="Playfair Display"/>
+              </a:rPr>
+              <a:t>PROBLEM STATEMENT</a:t>
+            </a:r>
+            <a:endParaRPr dirty="0"/>
+          </a:p>
+        </p:txBody>
+      </p:sp>
+      <p:sp>
+        <p:nvSpPr>
+          <p:cNvPr id="116" name="Google Shape;110;p14_r16_r32"/>
+          <p:cNvSpPr/>
+          <p:nvPr/>
+        </p:nvSpPr>
+        <p:spPr>
+          <a:xfrm>
+            <a:off x="571500" y="1323975"/>
+            <a:ext cx="11049000" cy="19050"/>
+          </a:xfrm>
+          <a:prstGeom prst="rect">
+            <a:avLst/>
+          </a:prstGeom>
+          <a:solidFill>
+            <a:srgbClr val="D4AF37"/>
+          </a:solidFill>
+          <a:ln>
+            <a:noFill/>
+          </a:ln>
+        </p:spPr>
+        <p:txBody>
+          <a:bodyPr spcFirstLastPara="1" wrap="square" lIns="91425" tIns="45700" rIns="91425" bIns="45700" anchor="ctr" anchorCtr="0">
+            <a:noAutofit/>
+          </a:bodyPr>
+          <a:lstStyle/>
+          <a:p>
+            <a:pPr marL="0" marR="0" lvl="0" indent="0" algn="ctr" rtl="0">
+              <a:spcBef>
+                <a:spcPts val="0"/>
+              </a:spcBef>
+              <a:spcAft>
+                <a:spcPts val="0"/>
+              </a:spcAft>
+              <a:buNone/>
+            </a:pPr>
+            <a:endParaRPr sz="1800" b="0" i="0" u="none" strike="noStrike" cap="none" dirty="0">
+              <a:solidFill>
+                <a:schemeClr val="dk1"/>
+              </a:solidFill>
+              <a:latin typeface="Calibri"/>
+              <a:ea typeface="Calibri"/>
+              <a:cs typeface="Calibri"/>
+              <a:sym typeface="Calibri"/>
+            </a:endParaRPr>
+          </a:p>
+        </p:txBody>
+      </p:sp>
+      <p:sp>
+        <p:nvSpPr>
+          <p:cNvPr id="117" name="Google Shape;111;p14_r17_r33"/>
+          <p:cNvSpPr txBox="1"/>
+          <p:nvPr/>
+        </p:nvSpPr>
+        <p:spPr>
+          <a:xfrm>
+            <a:off x="11706225" y="6467475"/>
+            <a:ext cx="200025" cy="161583"/>
+          </a:xfrm>
+          <a:prstGeom prst="rect">
+            <a:avLst/>
+          </a:prstGeom>
+          <a:noFill/>
+          <a:ln>
+            <a:noFill/>
+          </a:ln>
+        </p:spPr>
+        <p:txBody>
+          <a:bodyPr spcFirstLastPara="1" wrap="square" lIns="0" tIns="0" rIns="0" bIns="0" anchor="t" anchorCtr="0">
+            <a:spAutoFit/>
+          </a:bodyPr>
+          <a:lstStyle/>
+          <a:p>
+            <a:r>
+              <a:t>02</a:t>
+            </a:r>
+          </a:p>
+        </p:txBody>
+      </p:sp>
+      <p:pic>
+        <p:nvPicPr>
+          <p:cNvPr id="15" name="Picture 6_r18_r34">
+            <a:extLst>
+              <a:ext uri="{FF2B5EF4-FFF2-40B4-BE49-F238E27FC236}">
+                <a16:creationId xmlns:a16="http://schemas.microsoft.com/office/drawing/2014/main" id="{81D6A019-74ED-9001-54F2-BCA9F7EF5C85}"/>
+              </a:ext>
+            </a:extLst>
+          </p:cNvPr>
+          <p:cNvPicPr>
+            <a:picLocks noChangeAspect="1"/>
+          </p:cNvPicPr>
+          <p:nvPr/>
+        </p:nvPicPr>
+        <p:blipFill>
+          <a:blip r:embed="rId6"/>
+          <a:stretch>
+            <a:fillRect/>
+          </a:stretch>
+        </p:blipFill>
+        <p:spPr>
+          <a:xfrm>
+            <a:off x="9361386" y="134593"/>
+            <a:ext cx="2259114" cy="1169718"/>
+          </a:xfrm>
+          <a:prstGeom prst="rect">
+            <a:avLst/>
+          </a:prstGeom>
+        </p:spPr>
+      </p:pic>
+      <p:grpSp>
+        <p:nvGrpSpPr>
+          <p:cNvPr id="16" name="Group 5_r19_r35">
+            <a:extLst>
+              <a:ext uri="{FF2B5EF4-FFF2-40B4-BE49-F238E27FC236}">
+                <a16:creationId xmlns:a16="http://schemas.microsoft.com/office/drawing/2014/main" id="{CF6956BC-D0DD-126D-0DC6-421091A25E5A}"/>
+              </a:ext>
+            </a:extLst>
+          </p:cNvPr>
+          <p:cNvGrpSpPr/>
+          <p:nvPr/>
+        </p:nvGrpSpPr>
+        <p:grpSpPr>
+          <a:xfrm>
+            <a:off x="571500" y="4842353"/>
+            <a:ext cx="5238750" cy="314325"/>
+            <a:chOff x="571500" y="4762500"/>
+            <a:chExt cx="5238750" cy="314325"/>
+          </a:xfrm>
+        </p:grpSpPr>
+        <p:sp>
+          <p:nvSpPr>
+            <p:cNvPr id="104" name="Google Shape;103;p14_r20"/>
+            <p:cNvSpPr txBox="1"/>
+            <p:nvPr/>
+          </p:nvSpPr>
+          <p:spPr>
+            <a:xfrm>
+              <a:off x="1000125" y="4762500"/>
+              <a:ext cx="4810125" cy="314325"/>
+            </a:xfrm>
+            <a:prstGeom prst="rect">
+              <a:avLst/>
+            </a:prstGeom>
+            <a:noFill/>
+            <a:ln>
+              <a:noFill/>
+            </a:ln>
+          </p:spPr>
+          <p:txBody>
+            <a:bodyPr spcFirstLastPara="1" wrap="square" lIns="0" tIns="0" rIns="0" bIns="0" anchor="t" anchorCtr="0">
+              <a:spAutoFit/>
+            </a:bodyPr>
+            <a:lstStyle/>
+            <a:p>
+              <a:pPr marL="0" marR="0" lvl="0" indent="0" algn="l" rtl="0">
+                <a:lnSpc>
+                  <a:spcPct val="150000"/>
+                </a:lnSpc>
+                <a:spcBef>
+                  <a:spcPts val="0"/>
+                </a:spcBef>
+                <a:spcAft>
+                  <a:spcPts val="0"/>
+                </a:spcAft>
+                <a:buNone/>
+              </a:pPr>
+              <a:r>
+                <a:rPr lang="en-US" sz="1650" b="0" i="0" u="none" strike="noStrike" cap="none" dirty="0">
+                  <a:solidFill>
+                    <a:srgbClr val="FFFFFF"/>
+                  </a:solidFill>
+                  <a:latin typeface="Poppins Light"/>
+                  <a:ea typeface="Poppins Light"/>
+                  <a:cs typeface="Poppins Light"/>
+                  <a:sym typeface="Poppins Light"/>
+                </a:rPr>
+                <a:t>Losses grew 20× by 2024; every bank warns, no defense exists</a:t>
+              </a:r>
+              <a:endParaRPr dirty="0"/>
+            </a:p>
+          </p:txBody>
+        </p:sp>
+        <p:pic>
+          <p:nvPicPr>
+            <p:cNvPr id="112" name="Google Shape;108;p14_r21" descr="image.png"/>
+            <p:cNvPicPr preferRelativeResize="0"/>
+            <p:nvPr/>
+          </p:nvPicPr>
+          <p:blipFill rotWithShape="1">
+            <a:blip r:embed="rId5">
+              <a:alphaModFix/>
+            </a:blip>
+            <a:srcRect/>
+            <a:stretch/>
+          </p:blipFill>
+          <p:spPr>
+            <a:xfrm>
+              <a:off x="571500" y="4791075"/>
+              <a:ext cx="200025" cy="247650"/>
+            </a:xfrm>
+            <a:prstGeom prst="rect">
+              <a:avLst/>
+            </a:prstGeom>
+            <a:noFill/>
+            <a:ln>
+              <a:noFill/>
+            </a:ln>
+          </p:spPr>
+        </p:pic>
+      </p:grpSp>
+      <p:grpSp>
+        <p:nvGrpSpPr>
+          <p:cNvPr id="17" name="Group 5_r22_r36">
+            <a:extLst>
+              <a:ext uri="{FF2B5EF4-FFF2-40B4-BE49-F238E27FC236}">
+                <a16:creationId xmlns:a16="http://schemas.microsoft.com/office/drawing/2014/main" id="{CF6956BC-D0DD-126D-0DC6-421091A25E5A}"/>
+              </a:ext>
+            </a:extLst>
+          </p:cNvPr>
+          <p:cNvGrpSpPr/>
+          <p:nvPr/>
+        </p:nvGrpSpPr>
+        <p:grpSpPr>
+          <a:xfrm>
+            <a:off x="571500" y="5390993"/>
+            <a:ext cx="5238750" cy="314325"/>
+            <a:chOff x="571500" y="4762500"/>
+            <a:chExt cx="5238750" cy="314325"/>
+          </a:xfrm>
+        </p:grpSpPr>
+        <p:sp>
+          <p:nvSpPr>
+            <p:cNvPr id="113" name="Google Shape;103;p14_r23"/>
+            <p:cNvSpPr txBox="1"/>
+            <p:nvPr/>
+          </p:nvSpPr>
+          <p:spPr>
+            <a:xfrm>
+              <a:off x="1000125" y="4762500"/>
+              <a:ext cx="4810125" cy="314325"/>
+            </a:xfrm>
+            <a:prstGeom prst="rect">
+              <a:avLst/>
+            </a:prstGeom>
+            <a:noFill/>
+            <a:ln>
+              <a:noFill/>
+            </a:ln>
+          </p:spPr>
+          <p:txBody>
+            <a:bodyPr spcFirstLastPara="1" wrap="square" lIns="0" tIns="0" rIns="0" bIns="0" anchor="t" anchorCtr="0">
+              <a:spAutoFit/>
+            </a:bodyPr>
+            <a:lstStyle/>
+            <a:p>
+              <a:pPr marL="0" marR="0" lvl="0" indent="0" algn="l" rtl="0">
+                <a:lnSpc>
+                  <a:spcPct val="150000"/>
+                </a:lnSpc>
+                <a:spcBef>
+                  <a:spcPts val="0"/>
+                </a:spcBef>
+                <a:spcAft>
+                  <a:spcPts val="0"/>
+                </a:spcAft>
+                <a:buNone/>
+              </a:pPr>
+              <a:r>
+                <a:rPr lang="en-US" sz="1650" b="0" i="0" u="none" strike="noStrike" cap="none" dirty="0">
+                  <a:solidFill>
+                    <a:srgbClr val="FFFFFF"/>
+                  </a:solidFill>
+                  <a:latin typeface="Poppins Light"/>
+                  <a:ea typeface="Poppins Light"/>
+                  <a:cs typeface="Poppins Light"/>
+                  <a:sym typeface="Poppins Light"/>
+                </a:rPr>
+                <a:t>Fraud completes at ONE moment: the UPI payment - unguarded</a:t>
+              </a:r>
+              <a:endParaRPr dirty="0"/>
+            </a:p>
+          </p:txBody>
+        </p:sp>
+        <p:pic>
+          <p:nvPicPr>
+            <p:cNvPr id="114" name="Google Shape;108;p14_r24" descr="image.png"/>
+            <p:cNvPicPr preferRelativeResize="0"/>
+            <p:nvPr/>
+          </p:nvPicPr>
+          <p:blipFill rotWithShape="1">
+            <a:blip r:embed="rId5">
+              <a:alphaModFix/>
+            </a:blip>
+            <a:srcRect/>
+            <a:stretch/>
+          </p:blipFill>
+          <p:spPr>
+            <a:xfrm>
+              <a:off x="571500" y="4791075"/>
+              <a:ext cx="200025" cy="247650"/>
+            </a:xfrm>
+            <a:prstGeom prst="rect">
+              <a:avLst/>
+            </a:prstGeom>
+            <a:noFill/>
+            <a:ln>
+              <a:noFill/>
+            </a:ln>
+          </p:spPr>
+        </p:pic>
+      </p:grpSp>
+    </p:spTree>
+  </p:cSld>
+  <p:clrMapOvr>
+    <a:masterClrMapping/>
+  </p:clrMapOvr>
+</p:sld>
+</file>
+
+<file path=ppt/slides/slide3.xml><?xml version="1.0" encoding="utf-8"?>
+<p:sld xmlns:a="http://schemas.openxmlformats.org/drawingml/2006/main" xmlns:r="http://schemas.openxmlformats.org/officeDocument/2006/relationships" xmlns:p="http://schemas.openxmlformats.org/presentationml/2006/main">
+  <p:cSld>
+    <p:spTree>
+      <p:nvGrpSpPr>
+        <p:cNvPr id="1" name="Shape 97"/>
+        <p:cNvGrpSpPr/>
+        <p:nvPr/>
+      </p:nvGrpSpPr>
+      <p:grpSpPr>
+        <a:xfrm>
+          <a:off x="0" y="0"/>
+          <a:ext cx="0" cy="0"/>
+          <a:chOff x="0" y="0"/>
+          <a:chExt cx="0" cy="0"/>
+        </a:xfrm>
+      </p:grpSpPr>
+      <p:pic>
+        <p:nvPicPr>
+          <p:cNvPr id="10" name="Google Shape;84;p13_r1_r25" descr="image.png">
+            <a:extLst>
+              <a:ext uri="{FF2B5EF4-FFF2-40B4-BE49-F238E27FC236}">
+                <a16:creationId xmlns:a16="http://schemas.microsoft.com/office/drawing/2014/main" id="{A7427FBB-6B82-28C2-C807-6A3DF49A1F1A}"/>
+              </a:ext>
+            </a:extLst>
+          </p:cNvPr>
+          <p:cNvPicPr preferRelativeResize="0"/>
+          <p:nvPr/>
+        </p:nvPicPr>
+        <p:blipFill rotWithShape="1">
+          <a:blip r:embed="rId3">
+            <a:alphaModFix/>
+          </a:blip>
+          <a:srcRect/>
+          <a:stretch/>
+        </p:blipFill>
+        <p:spPr>
+          <a:xfrm>
+            <a:off x="-157315" y="-88489"/>
+            <a:ext cx="12457469" cy="7007326"/>
+          </a:xfrm>
+          <a:prstGeom prst="rect">
+            <a:avLst/>
+          </a:prstGeom>
+          <a:noFill/>
+          <a:ln>
+            <a:noFill/>
+          </a:ln>
+        </p:spPr>
+      </p:pic>
+      <p:pic>
+        <p:nvPicPr>
+          <p:cNvPr id="99" name="Google Shape;98;p14_r2_r26" descr="image.png"/>
+          <p:cNvPicPr preferRelativeResize="0"/>
+          <p:nvPr/>
+        </p:nvPicPr>
+        <p:blipFill rotWithShape="1">
+          <a:blip r:embed="rId4">
+            <a:alphaModFix amt="50000"/>
+          </a:blip>
+          <a:srcRect/>
+          <a:stretch/>
+        </p:blipFill>
+        <p:spPr>
+          <a:xfrm>
+            <a:off x="0" y="0"/>
+            <a:ext cx="12192000" cy="6858000"/>
+          </a:xfrm>
+          <a:prstGeom prst="rect">
+            <a:avLst/>
+          </a:prstGeom>
+          <a:noFill/>
+          <a:ln>
+            <a:noFill/>
+          </a:ln>
+        </p:spPr>
+      </p:pic>
+      <p:grpSp>
+        <p:nvGrpSpPr>
+          <p:cNvPr id="11" name="Group 2_r3_r27">
+            <a:extLst>
+              <a:ext uri="{FF2B5EF4-FFF2-40B4-BE49-F238E27FC236}">
+                <a16:creationId xmlns:a16="http://schemas.microsoft.com/office/drawing/2014/main" id="{A73E524B-A1B2-0008-AF1C-66E70946F0B4}"/>
+              </a:ext>
+            </a:extLst>
+          </p:cNvPr>
+          <p:cNvGrpSpPr/>
+          <p:nvPr/>
+        </p:nvGrpSpPr>
+        <p:grpSpPr>
+          <a:xfrm>
+            <a:off x="571500" y="2658491"/>
+            <a:ext cx="10977715" cy="380873"/>
+            <a:chOff x="571500" y="2719451"/>
+            <a:chExt cx="10977715" cy="380873"/>
+          </a:xfrm>
+        </p:grpSpPr>
+        <p:sp>
+          <p:nvSpPr>
+            <p:cNvPr id="100" name="Google Shape;100;p14_r4"/>
+            <p:cNvSpPr txBox="1"/>
+            <p:nvPr/>
+          </p:nvSpPr>
+          <p:spPr>
+            <a:xfrm>
+              <a:off x="928840" y="2719451"/>
+              <a:ext cx="10620375" cy="380873"/>
+            </a:xfrm>
+            <a:prstGeom prst="rect">
+              <a:avLst/>
+            </a:prstGeom>
+            <a:noFill/>
+            <a:ln>
+              <a:noFill/>
+            </a:ln>
+          </p:spPr>
+          <p:txBody>
+            <a:bodyPr spcFirstLastPara="1" wrap="square" lIns="0" tIns="0" rIns="0" bIns="0" anchor="t" anchorCtr="0">
+              <a:spAutoFit/>
+            </a:bodyPr>
+            <a:lstStyle/>
+            <a:p>
+              <a:pPr marL="0" marR="0" lvl="0" indent="0" algn="l" rtl="0">
+                <a:lnSpc>
+                  <a:spcPct val="150000"/>
+                </a:lnSpc>
+                <a:spcBef>
+                  <a:spcPts val="0"/>
+                </a:spcBef>
+                <a:spcAft>
+                  <a:spcPts val="0"/>
+                </a:spcAft>
+                <a:buNone/>
+              </a:pPr>
+              <a:r>
+                <a:rPr lang="en-US" sz="1650" b="0" i="0" u="none" strike="noStrike" cap="none" dirty="0">
+                  <a:solidFill>
+                    <a:srgbClr val="FFFFFF"/>
+                  </a:solidFill>
+                  <a:latin typeface="Poppins Light"/>
+                  <a:ea typeface="Poppins Light"/>
+                  <a:cs typeface="Poppins Light"/>
+                  <a:sym typeface="Poppins Light"/>
+                </a:rPr>
+                <a:t>PROPOSED SOLUTION</a:t>
+              </a:r>
+              <a:endParaRPr dirty="0"/>
+            </a:p>
+          </p:txBody>
+        </p:sp>
+        <p:pic>
+          <p:nvPicPr>
+            <p:cNvPr id="105" name="Google Shape;105;p14_r5" descr="image.png"/>
+            <p:cNvPicPr preferRelativeResize="0"/>
+            <p:nvPr/>
+          </p:nvPicPr>
+          <p:blipFill rotWithShape="1">
+            <a:blip r:embed="rId5">
+              <a:alphaModFix/>
+            </a:blip>
+            <a:srcRect/>
+            <a:stretch/>
+          </p:blipFill>
+          <p:spPr>
+            <a:xfrm>
+              <a:off x="571500" y="2819400"/>
+              <a:ext cx="200025" cy="247650"/>
+            </a:xfrm>
+            <a:prstGeom prst="rect">
+              <a:avLst/>
+            </a:prstGeom>
+            <a:noFill/>
+            <a:ln>
+              <a:noFill/>
+            </a:ln>
+          </p:spPr>
+        </p:pic>
+      </p:grpSp>
+      <p:grpSp>
+        <p:nvGrpSpPr>
+          <p:cNvPr id="12" name="Group 3_r6_r28">
+            <a:extLst>
+              <a:ext uri="{FF2B5EF4-FFF2-40B4-BE49-F238E27FC236}">
+                <a16:creationId xmlns:a16="http://schemas.microsoft.com/office/drawing/2014/main" id="{8BDCEEF2-B973-65CB-4419-90818D61867D}"/>
+              </a:ext>
+            </a:extLst>
+          </p:cNvPr>
+          <p:cNvGrpSpPr/>
+          <p:nvPr/>
+        </p:nvGrpSpPr>
+        <p:grpSpPr>
+          <a:xfrm>
+            <a:off x="571500" y="3188813"/>
+            <a:ext cx="5238750" cy="314325"/>
+            <a:chOff x="571500" y="3657600"/>
+            <a:chExt cx="5238750" cy="314325"/>
+          </a:xfrm>
+        </p:grpSpPr>
+        <p:sp>
+          <p:nvSpPr>
+            <p:cNvPr id="101" name="Google Shape;101;p14_r7"/>
+            <p:cNvSpPr txBox="1"/>
+            <p:nvPr/>
+          </p:nvSpPr>
+          <p:spPr>
+            <a:xfrm>
+              <a:off x="1000125" y="3657600"/>
+              <a:ext cx="4810125" cy="314325"/>
+            </a:xfrm>
+            <a:prstGeom prst="rect">
+              <a:avLst/>
+            </a:prstGeom>
+            <a:noFill/>
+            <a:ln>
+              <a:noFill/>
+            </a:ln>
+          </p:spPr>
+          <p:txBody>
+            <a:bodyPr spcFirstLastPara="1" wrap="square" lIns="0" tIns="0" rIns="0" bIns="0" anchor="t" anchorCtr="0">
+              <a:spAutoFit/>
+            </a:bodyPr>
+            <a:lstStyle/>
+            <a:p>
+              <a:pPr marL="0" marR="0" lvl="0" indent="0" algn="l" rtl="0">
+                <a:lnSpc>
+                  <a:spcPct val="150000"/>
+                </a:lnSpc>
+                <a:spcBef>
+                  <a:spcPts val="0"/>
+                </a:spcBef>
+                <a:spcAft>
+                  <a:spcPts val="0"/>
+                </a:spcAft>
+                <a:buNone/>
+              </a:pPr>
+              <a:r>
+                <a:rPr lang="en-US" sz="1650" b="0" i="0" u="none" strike="noStrike" cap="none" dirty="0">
+                  <a:solidFill>
+                    <a:srgbClr val="FFFFFF"/>
+                  </a:solidFill>
+                  <a:latin typeface="Poppins Light"/>
+                  <a:ea typeface="Poppins Light"/>
+                  <a:cs typeface="Poppins Light"/>
+                  <a:sym typeface="Poppins Light"/>
+                </a:rPr>
+                <a:t>On-call AI flags scam language + pressure (Hindi first)</a:t>
+              </a:r>
+              <a:endParaRPr dirty="0"/>
+            </a:p>
+          </p:txBody>
+        </p:sp>
+        <p:pic>
+          <p:nvPicPr>
+            <p:cNvPr id="106" name="Google Shape;106;p14_r8" descr="image.png"/>
+            <p:cNvPicPr preferRelativeResize="0"/>
+            <p:nvPr/>
+          </p:nvPicPr>
+          <p:blipFill rotWithShape="1">
+            <a:blip r:embed="rId5">
+              <a:alphaModFix/>
+            </a:blip>
+            <a:srcRect/>
+            <a:stretch/>
+          </p:blipFill>
+          <p:spPr>
+            <a:xfrm>
+              <a:off x="571500" y="3686175"/>
+              <a:ext cx="200025" cy="247650"/>
+            </a:xfrm>
+            <a:prstGeom prst="rect">
+              <a:avLst/>
+            </a:prstGeom>
+            <a:noFill/>
+            <a:ln>
+              <a:noFill/>
+            </a:ln>
+          </p:spPr>
+        </p:pic>
+      </p:grpSp>
+      <p:grpSp>
+        <p:nvGrpSpPr>
+          <p:cNvPr id="13" name="Group 4_r9_r29">
+            <a:extLst>
+              <a:ext uri="{FF2B5EF4-FFF2-40B4-BE49-F238E27FC236}">
+                <a16:creationId xmlns:a16="http://schemas.microsoft.com/office/drawing/2014/main" id="{776B38BC-4A69-5F43-A0F5-137CD55E4FA8}"/>
+              </a:ext>
+            </a:extLst>
+          </p:cNvPr>
+          <p:cNvGrpSpPr/>
+          <p:nvPr/>
+        </p:nvGrpSpPr>
+        <p:grpSpPr>
+          <a:xfrm>
+            <a:off x="571500" y="3741263"/>
+            <a:ext cx="5238750" cy="314325"/>
+            <a:chOff x="571500" y="4210050"/>
+            <a:chExt cx="5238750" cy="314325"/>
+          </a:xfrm>
+        </p:grpSpPr>
+        <p:sp>
+          <p:nvSpPr>
+            <p:cNvPr id="102" name="Google Shape;102;p14_r10"/>
+            <p:cNvSpPr txBox="1"/>
+            <p:nvPr/>
+          </p:nvSpPr>
+          <p:spPr>
+            <a:xfrm>
+              <a:off x="1000125" y="4210050"/>
+              <a:ext cx="4810125" cy="314325"/>
+            </a:xfrm>
+            <a:prstGeom prst="rect">
+              <a:avLst/>
+            </a:prstGeom>
+            <a:noFill/>
+            <a:ln>
+              <a:noFill/>
+            </a:ln>
+          </p:spPr>
+          <p:txBody>
+            <a:bodyPr spcFirstLastPara="1" wrap="square" lIns="0" tIns="0" rIns="0" bIns="0" anchor="t" anchorCtr="0">
+              <a:spAutoFit/>
+            </a:bodyPr>
+            <a:lstStyle/>
+            <a:p>
+              <a:pPr marL="0" marR="0" lvl="0" indent="0" algn="l" rtl="0">
+                <a:lnSpc>
+                  <a:spcPct val="150000"/>
+                </a:lnSpc>
+                <a:spcBef>
+                  <a:spcPts val="0"/>
+                </a:spcBef>
+                <a:spcAft>
+                  <a:spcPts val="0"/>
+                </a:spcAft>
+                <a:buNone/>
+              </a:pPr>
+              <a:r>
+                <a:rPr lang="en-US" sz="1650" b="0" i="0" u="none" strike="noStrike" cap="none" dirty="0">
+                  <a:solidFill>
+                    <a:srgbClr val="FFFFFF"/>
+                  </a:solidFill>
+                  <a:latin typeface="Poppins Light"/>
+                  <a:ea typeface="Poppins Light"/>
+                  <a:cs typeface="Poppins Light"/>
+                  <a:sym typeface="Poppins Light"/>
+                </a:rPr>
+                <a:t>PAUSE at the payment moment: warn + family confirmation before PIN</a:t>
+              </a:r>
+              <a:endParaRPr dirty="0"/>
+            </a:p>
+          </p:txBody>
+        </p:sp>
+        <p:pic>
+          <p:nvPicPr>
+            <p:cNvPr id="107" name="Google Shape;107;p14_r11" descr="image.png"/>
+            <p:cNvPicPr preferRelativeResize="0"/>
+            <p:nvPr/>
+          </p:nvPicPr>
+          <p:blipFill rotWithShape="1">
+            <a:blip r:embed="rId5">
+              <a:alphaModFix/>
+            </a:blip>
+            <a:srcRect/>
+            <a:stretch/>
+          </p:blipFill>
+          <p:spPr>
+            <a:xfrm>
+              <a:off x="571500" y="4238625"/>
+              <a:ext cx="200025" cy="247650"/>
+            </a:xfrm>
+            <a:prstGeom prst="rect">
+              <a:avLst/>
+            </a:prstGeom>
+            <a:noFill/>
+            <a:ln>
+              <a:noFill/>
+            </a:ln>
+          </p:spPr>
+        </p:pic>
+      </p:grpSp>
+      <p:grpSp>
+        <p:nvGrpSpPr>
+          <p:cNvPr id="14" name="Group 5_r12_r30">
+            <a:extLst>
+              <a:ext uri="{FF2B5EF4-FFF2-40B4-BE49-F238E27FC236}">
+                <a16:creationId xmlns:a16="http://schemas.microsoft.com/office/drawing/2014/main" id="{CF6956BC-D0DD-126D-0DC6-421091A25E5A}"/>
+              </a:ext>
+            </a:extLst>
+          </p:cNvPr>
+          <p:cNvGrpSpPr/>
+          <p:nvPr/>
+        </p:nvGrpSpPr>
+        <p:grpSpPr>
+          <a:xfrm>
+            <a:off x="571500" y="4293713"/>
+            <a:ext cx="5238750" cy="314325"/>
+            <a:chOff x="571500" y="4762500"/>
+            <a:chExt cx="5238750" cy="314325"/>
+          </a:xfrm>
+        </p:grpSpPr>
+        <p:sp>
+          <p:nvSpPr>
+            <p:cNvPr id="103" name="Google Shape;103;p14_r13"/>
+            <p:cNvSpPr txBox="1"/>
+            <p:nvPr/>
+          </p:nvSpPr>
+          <p:spPr>
+            <a:xfrm>
+              <a:off x="1000125" y="4762500"/>
+              <a:ext cx="4810125" cy="314325"/>
+            </a:xfrm>
+            <a:prstGeom prst="rect">
+              <a:avLst/>
+            </a:prstGeom>
+            <a:noFill/>
+            <a:ln>
+              <a:noFill/>
+            </a:ln>
+          </p:spPr>
+          <p:txBody>
+            <a:bodyPr spcFirstLastPara="1" wrap="square" lIns="0" tIns="0" rIns="0" bIns="0" anchor="t" anchorCtr="0">
+              <a:spAutoFit/>
+            </a:bodyPr>
+            <a:lstStyle/>
+            <a:p>
+              <a:pPr marL="0" marR="0" lvl="0" indent="0" algn="l" rtl="0">
+                <a:lnSpc>
+                  <a:spcPct val="150000"/>
+                </a:lnSpc>
+                <a:spcBef>
+                  <a:spcPts val="0"/>
+                </a:spcBef>
+                <a:spcAft>
+                  <a:spcPts val="0"/>
+                </a:spcAft>
+                <a:buNone/>
+              </a:pPr>
+              <a:r>
+                <a:rPr lang="en-US" sz="1650" b="0" i="0" u="none" strike="noStrike" cap="none" dirty="0">
+                  <a:solidFill>
+                    <a:srgbClr val="FFFFFF"/>
+                  </a:solidFill>
+                  <a:latin typeface="Poppins Light"/>
+                  <a:ea typeface="Poppins Light"/>
+                  <a:cs typeface="Poppins Light"/>
+                  <a:sym typeface="Poppins Light"/>
+                </a:rPr>
+                <a:t>One-tap verified report to 1930 / Chakshu, tamper-proof evidence</a:t>
+              </a:r>
+              <a:endParaRPr dirty="0"/>
+            </a:p>
+          </p:txBody>
+        </p:sp>
+        <p:pic>
+          <p:nvPicPr>
+            <p:cNvPr id="108" name="Google Shape;108;p14_r14" descr="image.png"/>
+            <p:cNvPicPr preferRelativeResize="0"/>
+            <p:nvPr/>
+          </p:nvPicPr>
+          <p:blipFill rotWithShape="1">
+            <a:blip r:embed="rId5">
+              <a:alphaModFix/>
+            </a:blip>
+            <a:srcRect/>
+            <a:stretch/>
+          </p:blipFill>
+          <p:spPr>
+            <a:xfrm>
+              <a:off x="571500" y="4791075"/>
+              <a:ext cx="200025" cy="247650"/>
+            </a:xfrm>
+            <a:prstGeom prst="rect">
+              <a:avLst/>
+            </a:prstGeom>
+            <a:noFill/>
+            <a:ln>
+              <a:noFill/>
+            </a:ln>
+          </p:spPr>
+        </p:pic>
+      </p:grpSp>
+      <p:sp>
+        <p:nvSpPr>
+          <p:cNvPr id="115" name="Google Shape;109;p14_r15_r31"/>
+          <p:cNvSpPr txBox="1"/>
+          <p:nvPr/>
+        </p:nvSpPr>
+        <p:spPr>
+          <a:xfrm>
+            <a:off x="571500" y="571500"/>
+            <a:ext cx="11601450" cy="628650"/>
+          </a:xfrm>
+          <a:prstGeom prst="rect">
+            <a:avLst/>
+          </a:prstGeom>
+          <a:noFill/>
+          <a:ln>
+            <a:noFill/>
+          </a:ln>
+        </p:spPr>
+        <p:txBody>
+          <a:bodyPr spcFirstLastPara="1" wrap="square" lIns="0" tIns="0" rIns="0" bIns="0" anchor="t" anchorCtr="0">
+            <a:spAutoFit/>
+          </a:bodyPr>
+          <a:lstStyle/>
+          <a:p>
+            <a:pPr marL="0" marR="0" lvl="0" indent="0" algn="l" rtl="0">
+              <a:spcBef>
+                <a:spcPts val="0"/>
+              </a:spcBef>
+              <a:spcAft>
+                <a:spcPts val="0"/>
+              </a:spcAft>
+              <a:buNone/>
+            </a:pPr>
+            <a:r>
+              <a:rPr lang="en-US" sz="3600" b="1" i="0" u="none" strike="noStrike" cap="none" dirty="0">
+                <a:solidFill>
+                  <a:srgbClr val="F2EEFA"/>
+                </a:solidFill>
+                <a:latin typeface="Playfair Display"/>
+                <a:ea typeface="Playfair Display"/>
+                <a:cs typeface="Playfair Display"/>
+                <a:sym typeface="Playfair Display"/>
+              </a:rPr>
+              <a:t>KAVACH - RECOGNIZE → INTERRUPT →</a:t>
+            </a:r>
+            <a:endParaRPr dirty="0"/>
+          </a:p>
+          <a:p>
+            <a:r>
+              <a:rPr>
+                <a:solidFill>
+                  <a:srgbClr val="FFFFFF"/>
+                </a:solidFill>
+              </a:rPr>
+              <a:t>VERIFY → PACKAGE → REPORT</a:t>
+            </a:r>
+          </a:p>
+        </p:txBody>
+      </p:sp>
+      <p:sp>
+        <p:nvSpPr>
+          <p:cNvPr id="116" name="Google Shape;110;p14_r16_r32"/>
+          <p:cNvSpPr/>
+          <p:nvPr/>
+        </p:nvSpPr>
+        <p:spPr>
+          <a:xfrm>
+            <a:off x="571500" y="1323975"/>
+            <a:ext cx="11049000" cy="19050"/>
+          </a:xfrm>
+          <a:prstGeom prst="rect">
+            <a:avLst/>
+          </a:prstGeom>
+          <a:solidFill>
+            <a:srgbClr val="D4AF37"/>
+          </a:solidFill>
+          <a:ln>
+            <a:noFill/>
+          </a:ln>
+        </p:spPr>
+        <p:txBody>
+          <a:bodyPr spcFirstLastPara="1" wrap="square" lIns="91425" tIns="45700" rIns="91425" bIns="45700" anchor="ctr" anchorCtr="0">
+            <a:noAutofit/>
+          </a:bodyPr>
+          <a:lstStyle/>
+          <a:p>
+            <a:pPr marL="0" marR="0" lvl="0" indent="0" algn="ctr" rtl="0">
+              <a:spcBef>
+                <a:spcPts val="0"/>
+              </a:spcBef>
+              <a:spcAft>
+                <a:spcPts val="0"/>
+              </a:spcAft>
+              <a:buNone/>
+            </a:pPr>
+            <a:endParaRPr sz="1800" b="0" i="0" u="none" strike="noStrike" cap="none" dirty="0">
+              <a:solidFill>
+                <a:schemeClr val="dk1"/>
+              </a:solidFill>
+              <a:latin typeface="Calibri"/>
+              <a:ea typeface="Calibri"/>
+              <a:cs typeface="Calibri"/>
+              <a:sym typeface="Calibri"/>
+            </a:endParaRPr>
+          </a:p>
+        </p:txBody>
+      </p:sp>
+      <p:sp>
+        <p:nvSpPr>
+          <p:cNvPr id="117" name="Google Shape;111;p14_r17_r33"/>
+          <p:cNvSpPr txBox="1"/>
+          <p:nvPr/>
+        </p:nvSpPr>
+        <p:spPr>
+          <a:xfrm>
+            <a:off x="11706225" y="6467475"/>
+            <a:ext cx="200025" cy="161583"/>
+          </a:xfrm>
+          <a:prstGeom prst="rect">
+            <a:avLst/>
+          </a:prstGeom>
+          <a:noFill/>
+          <a:ln>
+            <a:noFill/>
+          </a:ln>
+        </p:spPr>
+        <p:txBody>
+          <a:bodyPr spcFirstLastPara="1" wrap="square" lIns="0" tIns="0" rIns="0" bIns="0" anchor="t" anchorCtr="0">
+            <a:spAutoFit/>
+          </a:bodyPr>
+          <a:lstStyle/>
+          <a:p>
+            <a:r>
+              <a:t>03</a:t>
+            </a:r>
+          </a:p>
+        </p:txBody>
+      </p:sp>
+      <p:pic>
+        <p:nvPicPr>
+          <p:cNvPr id="15" name="Picture 6_r18_r34">
+            <a:extLst>
+              <a:ext uri="{FF2B5EF4-FFF2-40B4-BE49-F238E27FC236}">
+                <a16:creationId xmlns:a16="http://schemas.microsoft.com/office/drawing/2014/main" id="{81D6A019-74ED-9001-54F2-BCA9F7EF5C85}"/>
+              </a:ext>
+            </a:extLst>
+          </p:cNvPr>
+          <p:cNvPicPr>
+            <a:picLocks noChangeAspect="1"/>
+          </p:cNvPicPr>
+          <p:nvPr/>
+        </p:nvPicPr>
+        <p:blipFill>
+          <a:blip r:embed="rId6"/>
+          <a:stretch>
+            <a:fillRect/>
+          </a:stretch>
+        </p:blipFill>
+        <p:spPr>
+          <a:xfrm>
+            <a:off x="9361386" y="134593"/>
+            <a:ext cx="2259114" cy="1169718"/>
+          </a:xfrm>
+          <a:prstGeom prst="rect">
+            <a:avLst/>
+          </a:prstGeom>
+        </p:spPr>
+      </p:pic>
+      <p:grpSp>
+        <p:nvGrpSpPr>
+          <p:cNvPr id="16" name="Group 5_r19_r35">
+            <a:extLst>
+              <a:ext uri="{FF2B5EF4-FFF2-40B4-BE49-F238E27FC236}">
+                <a16:creationId xmlns:a16="http://schemas.microsoft.com/office/drawing/2014/main" id="{CF6956BC-D0DD-126D-0DC6-421091A25E5A}"/>
+              </a:ext>
+            </a:extLst>
+          </p:cNvPr>
+          <p:cNvGrpSpPr/>
+          <p:nvPr/>
+        </p:nvGrpSpPr>
+        <p:grpSpPr>
+          <a:xfrm>
+            <a:off x="571500" y="4842353"/>
+            <a:ext cx="5238750" cy="314325"/>
+            <a:chOff x="571500" y="4762500"/>
+            <a:chExt cx="5238750" cy="314325"/>
+          </a:xfrm>
+        </p:grpSpPr>
+        <p:sp>
+          <p:nvSpPr>
+            <p:cNvPr id="104" name="Google Shape;103;p14_r20"/>
+            <p:cNvSpPr txBox="1"/>
+            <p:nvPr/>
+          </p:nvSpPr>
+          <p:spPr>
+            <a:xfrm>
+              <a:off x="1000125" y="4762500"/>
+              <a:ext cx="4810125" cy="314325"/>
+            </a:xfrm>
+            <a:prstGeom prst="rect">
+              <a:avLst/>
+            </a:prstGeom>
+            <a:noFill/>
+            <a:ln>
+              <a:noFill/>
+            </a:ln>
+          </p:spPr>
+          <p:txBody>
+            <a:bodyPr spcFirstLastPara="1" wrap="square" lIns="0" tIns="0" rIns="0" bIns="0" anchor="t" anchorCtr="0">
+              <a:spAutoFit/>
+            </a:bodyPr>
+            <a:lstStyle/>
+            <a:p>
+              <a:pPr marL="0" marR="0" lvl="0" indent="0" algn="l" rtl="0">
+                <a:lnSpc>
+                  <a:spcPct val="150000"/>
+                </a:lnSpc>
+                <a:spcBef>
+                  <a:spcPts val="0"/>
+                </a:spcBef>
+                <a:spcAft>
+                  <a:spcPts val="0"/>
+                </a:spcAft>
+                <a:buNone/>
+              </a:pPr>
+              <a:r>
+                <a:rPr lang="en-US" sz="1650" b="0" i="0" u="none" strike="noStrike" cap="none" dirty="0">
+                  <a:solidFill>
+                    <a:srgbClr val="FFFFFF"/>
+                  </a:solidFill>
+                  <a:latin typeface="Poppins Light"/>
+                  <a:ea typeface="Poppins Light"/>
+                  <a:cs typeface="Poppins Light"/>
+                  <a:sym typeface="Poppins Light"/>
+                </a:rPr>
+                <a:t>How it solves: owns the seconds between 'scam' and 'money moved'</a:t>
+              </a:r>
+              <a:endParaRPr dirty="0"/>
+            </a:p>
+          </p:txBody>
+        </p:sp>
+        <p:pic>
+          <p:nvPicPr>
+            <p:cNvPr id="112" name="Google Shape;108;p14_r21" descr="image.png"/>
+            <p:cNvPicPr preferRelativeResize="0"/>
+            <p:nvPr/>
+          </p:nvPicPr>
+          <p:blipFill rotWithShape="1">
+            <a:blip r:embed="rId5">
+              <a:alphaModFix/>
+            </a:blip>
+            <a:srcRect/>
+            <a:stretch/>
+          </p:blipFill>
+          <p:spPr>
+            <a:xfrm>
+              <a:off x="571500" y="4791075"/>
+              <a:ext cx="200025" cy="247650"/>
+            </a:xfrm>
+            <a:prstGeom prst="rect">
+              <a:avLst/>
+            </a:prstGeom>
+            <a:noFill/>
+            <a:ln>
+              <a:noFill/>
+            </a:ln>
+          </p:spPr>
+        </p:pic>
+      </p:grpSp>
+      <p:grpSp>
+        <p:nvGrpSpPr>
+          <p:cNvPr id="17" name="Group 5_r22_r36">
+            <a:extLst>
+              <a:ext uri="{FF2B5EF4-FFF2-40B4-BE49-F238E27FC236}">
+                <a16:creationId xmlns:a16="http://schemas.microsoft.com/office/drawing/2014/main" id="{CF6956BC-D0DD-126D-0DC6-421091A25E5A}"/>
+              </a:ext>
+            </a:extLst>
+          </p:cNvPr>
+          <p:cNvGrpSpPr/>
+          <p:nvPr/>
+        </p:nvGrpSpPr>
+        <p:grpSpPr>
+          <a:xfrm>
+            <a:off x="571500" y="5390993"/>
+            <a:ext cx="5238750" cy="314325"/>
+            <a:chOff x="571500" y="4762500"/>
+            <a:chExt cx="5238750" cy="314325"/>
+          </a:xfrm>
+        </p:grpSpPr>
+        <p:sp>
+          <p:nvSpPr>
+            <p:cNvPr id="113" name="Google Shape;103;p14_r23"/>
+            <p:cNvSpPr txBox="1"/>
+            <p:nvPr/>
+          </p:nvSpPr>
+          <p:spPr>
+            <a:xfrm>
+              <a:off x="1000125" y="4762500"/>
+              <a:ext cx="4810125" cy="314325"/>
+            </a:xfrm>
+            <a:prstGeom prst="rect">
+              <a:avLst/>
+            </a:prstGeom>
+            <a:noFill/>
+            <a:ln>
+              <a:noFill/>
+            </a:ln>
+          </p:spPr>
+          <p:txBody>
+            <a:bodyPr spcFirstLastPara="1" wrap="square" lIns="0" tIns="0" rIns="0" bIns="0" anchor="t" anchorCtr="0">
+              <a:spAutoFit/>
+            </a:bodyPr>
+            <a:lstStyle/>
+            <a:p>
+              <a:pPr marL="0" marR="0" lvl="0" indent="0" algn="l" rtl="0">
+                <a:lnSpc>
+                  <a:spcPct val="150000"/>
+                </a:lnSpc>
+                <a:spcBef>
+                  <a:spcPts val="0"/>
+                </a:spcBef>
+                <a:spcAft>
+                  <a:spcPts val="0"/>
+                </a:spcAft>
+                <a:buNone/>
+              </a:pPr>
+              <a:r>
+                <a:rPr lang="en-US" sz="1650" b="0" i="0" u="none" strike="noStrike" cap="none" dirty="0">
+                  <a:solidFill>
+                    <a:srgbClr val="FFFFFF"/>
+                  </a:solidFill>
+                  <a:latin typeface="Poppins Light"/>
+                  <a:ea typeface="Poppins Light"/>
+                  <a:cs typeface="Poppins Light"/>
+                  <a:sym typeface="Poppins Light"/>
+                </a:rPr>
+                <a:t>Why it's new: India's first call-state + UPI-tripwire + evidence fusion</a:t>
+              </a:r>
+              <a:endParaRPr dirty="0"/>
+            </a:p>
+          </p:txBody>
+        </p:sp>
+        <p:pic>
+          <p:nvPicPr>
+            <p:cNvPr id="114" name="Google Shape;108;p14_r24" descr="image.png"/>
+            <p:cNvPicPr preferRelativeResize="0"/>
+            <p:nvPr/>
+          </p:nvPicPr>
+          <p:blipFill rotWithShape="1">
+            <a:blip r:embed="rId5">
+              <a:alphaModFix/>
+            </a:blip>
+            <a:srcRect/>
+            <a:stretch/>
+          </p:blipFill>
+          <p:spPr>
+            <a:xfrm>
+              <a:off x="571500" y="4791075"/>
+              <a:ext cx="200025" cy="247650"/>
+            </a:xfrm>
+            <a:prstGeom prst="rect">
+              <a:avLst/>
+            </a:prstGeom>
+            <a:noFill/>
+            <a:ln>
+              <a:noFill/>
+            </a:ln>
+          </p:spPr>
+        </p:pic>
+      </p:grpSp>
+    </p:spTree>
+  </p:cSld>
+  <p:clrMapOvr>
+    <a:masterClrMapping/>
+  </p:clrMapOvr>
+</p:sld>
+</file>
+
+<file path=ppt/slides/slide4.xml><?xml version="1.0" encoding="utf-8"?>
 <p:sld xmlns:a="http://schemas.openxmlformats.org/drawingml/2006/main" xmlns:p="http://schemas.openxmlformats.org/presentationml/2006/main" xmlns:r="http://schemas.openxmlformats.org/officeDocument/2006/relationships">
   <p:cSld>
     <p:spTree>
@@ -11819,7 +13539,7 @@
                   <a:cs typeface="Poppins Light"/>
                   <a:sym typeface="Poppins Light"/>
                 </a:rPr>
-                <a:t>THE BENCHMARK THEY CAN'T MEET —</a:t>
+                <a:t>THE BENCHMARK THEY CAN'T MEET -</a:t>
               </a:r>
               <a:endParaRPr dirty="0"/>
             </a:p>
@@ -12031,7 +13751,7 @@
                   <a:cs typeface="Poppins Light"/>
                   <a:sym typeface="Poppins Light"/>
                 </a:rPr>
-                <a:t>Generic models: 36.47–63.70% EER on real fraud calls — near useless</a:t>
+                <a:t>Generic models: 36.47–63.70% EER on real fraud calls - near useless</a:t>
               </a:r>
               <a:endParaRPr dirty="0"/>
             </a:p>
@@ -12132,7 +13852,7 @@
                   <a:cs typeface="Poppins Light"/>
                   <a:sym typeface="Poppins Light"/>
                 </a:rPr>
-                <a:t>Incident-trained model: 4.18% EER — our approach is 9× better</a:t>
+                <a:t>Incident-trained model: 4.18% EER - our approach is 9× better</a:t>
               </a:r>
               <a:endParaRPr dirty="0"/>
             </a:p>
@@ -12392,7 +14112,7 @@
                   <a:cs typeface="Poppins Light"/>
                   <a:sym typeface="Poppins Light"/>
                 </a:rPr>
-                <a:t>Hindi-telephony anti-spoof benchmark: doesn't exist — no one follows us</a:t>
+                <a:t>Hindi-telephony anti-spoof benchmark: doesn't exist - no one follows us</a:t>
               </a:r>
               <a:endParaRPr dirty="0"/>
             </a:p>
@@ -12594,7 +14314,7 @@
                   <a:cs typeface="Poppins Light"/>
                   <a:sym typeface="Poppins Light"/>
                 </a:rPr>
-                <a:t>Pindrop / Hiya: enterprise-only, English — can't read Hindi scams</a:t>
+                <a:t>Pindrop / Hiya: enterprise-only, English - can't read Hindi scams</a:t>
               </a:r>
               <a:endParaRPr dirty="0"/>
             </a:p>
@@ -12636,1727 +14356,7 @@
 </p:sld>
 </file>
 
-<file path=ppt/slides/slide2.xml><?xml version="1.0" encoding="utf-8"?>
-<p:sld xmlns:a="http://schemas.openxmlformats.org/drawingml/2006/main" xmlns:r="http://schemas.openxmlformats.org/officeDocument/2006/relationships" xmlns:p="http://schemas.openxmlformats.org/presentationml/2006/main">
-  <p:cSld>
-    <p:spTree>
-      <p:nvGrpSpPr>
-        <p:cNvPr id="1" name="Shape 97"/>
-        <p:cNvGrpSpPr/>
-        <p:nvPr/>
-      </p:nvGrpSpPr>
-      <p:grpSpPr>
-        <a:xfrm>
-          <a:off x="0" y="0"/>
-          <a:ext cx="0" cy="0"/>
-          <a:chOff x="0" y="0"/>
-          <a:chExt cx="0" cy="0"/>
-        </a:xfrm>
-      </p:grpSpPr>
-      <p:pic>
-        <p:nvPicPr>
-          <p:cNvPr id="10" name="Google Shape;84;p13_r1_r25" descr="image.png">
-            <a:extLst>
-              <a:ext uri="{FF2B5EF4-FFF2-40B4-BE49-F238E27FC236}">
-                <a16:creationId xmlns:a16="http://schemas.microsoft.com/office/drawing/2014/main" id="{A7427FBB-6B82-28C2-C807-6A3DF49A1F1A}"/>
-              </a:ext>
-            </a:extLst>
-          </p:cNvPr>
-          <p:cNvPicPr preferRelativeResize="0"/>
-          <p:nvPr/>
-        </p:nvPicPr>
-        <p:blipFill rotWithShape="1">
-          <a:blip r:embed="rId3">
-            <a:alphaModFix/>
-          </a:blip>
-          <a:srcRect/>
-          <a:stretch/>
-        </p:blipFill>
-        <p:spPr>
-          <a:xfrm>
-            <a:off x="-157315" y="-88489"/>
-            <a:ext cx="12457469" cy="7007326"/>
-          </a:xfrm>
-          <a:prstGeom prst="rect">
-            <a:avLst/>
-          </a:prstGeom>
-          <a:noFill/>
-          <a:ln>
-            <a:noFill/>
-          </a:ln>
-        </p:spPr>
-      </p:pic>
-      <p:pic>
-        <p:nvPicPr>
-          <p:cNvPr id="99" name="Google Shape;98;p14_r2_r26" descr="image.png"/>
-          <p:cNvPicPr preferRelativeResize="0"/>
-          <p:nvPr/>
-        </p:nvPicPr>
-        <p:blipFill rotWithShape="1">
-          <a:blip r:embed="rId4">
-            <a:alphaModFix amt="50000"/>
-          </a:blip>
-          <a:srcRect/>
-          <a:stretch/>
-        </p:blipFill>
-        <p:spPr>
-          <a:xfrm>
-            <a:off x="0" y="0"/>
-            <a:ext cx="12192000" cy="6858000"/>
-          </a:xfrm>
-          <a:prstGeom prst="rect">
-            <a:avLst/>
-          </a:prstGeom>
-          <a:noFill/>
-          <a:ln>
-            <a:noFill/>
-          </a:ln>
-        </p:spPr>
-      </p:pic>
-      <p:grpSp>
-        <p:nvGrpSpPr>
-          <p:cNvPr id="11" name="Group 2_r3_r27">
-            <a:extLst>
-              <a:ext uri="{FF2B5EF4-FFF2-40B4-BE49-F238E27FC236}">
-                <a16:creationId xmlns:a16="http://schemas.microsoft.com/office/drawing/2014/main" id="{A73E524B-A1B2-0008-AF1C-66E70946F0B4}"/>
-              </a:ext>
-            </a:extLst>
-          </p:cNvPr>
-          <p:cNvGrpSpPr/>
-          <p:nvPr/>
-        </p:nvGrpSpPr>
-        <p:grpSpPr>
-          <a:xfrm>
-            <a:off x="571500" y="2658491"/>
-            <a:ext cx="10977715" cy="380873"/>
-            <a:chOff x="571500" y="2719451"/>
-            <a:chExt cx="10977715" cy="380873"/>
-          </a:xfrm>
-        </p:grpSpPr>
-        <p:sp>
-          <p:nvSpPr>
-            <p:cNvPr id="100" name="Google Shape;100;p14_r4"/>
-            <p:cNvSpPr txBox="1"/>
-            <p:nvPr/>
-          </p:nvSpPr>
-          <p:spPr>
-            <a:xfrm>
-              <a:off x="928840" y="2719451"/>
-              <a:ext cx="10620375" cy="380873"/>
-            </a:xfrm>
-            <a:prstGeom prst="rect">
-              <a:avLst/>
-            </a:prstGeom>
-            <a:noFill/>
-            <a:ln>
-              <a:noFill/>
-            </a:ln>
-          </p:spPr>
-          <p:txBody>
-            <a:bodyPr spcFirstLastPara="1" wrap="square" lIns="0" tIns="0" rIns="0" bIns="0" anchor="t" anchorCtr="0">
-              <a:spAutoFit/>
-            </a:bodyPr>
-            <a:lstStyle/>
-            <a:p>
-              <a:pPr marL="0" marR="0" lvl="0" indent="0" algn="l" rtl="0">
-                <a:lnSpc>
-                  <a:spcPct val="150000"/>
-                </a:lnSpc>
-                <a:spcBef>
-                  <a:spcPts val="0"/>
-                </a:spcBef>
-                <a:spcAft>
-                  <a:spcPts val="0"/>
-                </a:spcAft>
-                <a:buNone/>
-              </a:pPr>
-              <a:r>
-                <a:rPr lang="en-US" sz="1650" b="0" i="0" u="none" strike="noStrike" cap="none" dirty="0">
-                  <a:solidFill>
-                    <a:srgbClr val="FFFFFF"/>
-                  </a:solidFill>
-                  <a:latin typeface="Poppins Light"/>
-                  <a:ea typeface="Poppins Light"/>
-                  <a:cs typeface="Poppins Light"/>
-                  <a:sym typeface="Poppins Light"/>
-                </a:rPr>
-                <a:t>DIGITAL ARREST IS INDIA'S FASTEST-GROWING FRAUD —</a:t>
-              </a:r>
-              <a:endParaRPr dirty="0"/>
-            </a:p>
-            <a:p>
-              <a:r>
-                <a:rPr>
-                  <a:solidFill>
-                    <a:srgbClr val="FFFFFF"/>
-                  </a:solidFill>
-                </a:rPr>
-                <a:t>AND ELDERS ARE THE TARGET</a:t>
-              </a:r>
-            </a:p>
-          </p:txBody>
-        </p:sp>
-        <p:pic>
-          <p:nvPicPr>
-            <p:cNvPr id="105" name="Google Shape;105;p14_r5" descr="image.png"/>
-            <p:cNvPicPr preferRelativeResize="0"/>
-            <p:nvPr/>
-          </p:nvPicPr>
-          <p:blipFill rotWithShape="1">
-            <a:blip r:embed="rId5">
-              <a:alphaModFix/>
-            </a:blip>
-            <a:srcRect/>
-            <a:stretch/>
-          </p:blipFill>
-          <p:spPr>
-            <a:xfrm>
-              <a:off x="571500" y="2819400"/>
-              <a:ext cx="200025" cy="247650"/>
-            </a:xfrm>
-            <a:prstGeom prst="rect">
-              <a:avLst/>
-            </a:prstGeom>
-            <a:noFill/>
-            <a:ln>
-              <a:noFill/>
-            </a:ln>
-          </p:spPr>
-        </p:pic>
-      </p:grpSp>
-      <p:grpSp>
-        <p:nvGrpSpPr>
-          <p:cNvPr id="12" name="Group 3_r6_r28">
-            <a:extLst>
-              <a:ext uri="{FF2B5EF4-FFF2-40B4-BE49-F238E27FC236}">
-                <a16:creationId xmlns:a16="http://schemas.microsoft.com/office/drawing/2014/main" id="{8BDCEEF2-B973-65CB-4419-90818D61867D}"/>
-              </a:ext>
-            </a:extLst>
-          </p:cNvPr>
-          <p:cNvGrpSpPr/>
-          <p:nvPr/>
-        </p:nvGrpSpPr>
-        <p:grpSpPr>
-          <a:xfrm>
-            <a:off x="571500" y="3188813"/>
-            <a:ext cx="5238750" cy="314325"/>
-            <a:chOff x="571500" y="3657600"/>
-            <a:chExt cx="5238750" cy="314325"/>
-          </a:xfrm>
-        </p:grpSpPr>
-        <p:sp>
-          <p:nvSpPr>
-            <p:cNvPr id="101" name="Google Shape;101;p14_r7"/>
-            <p:cNvSpPr txBox="1"/>
-            <p:nvPr/>
-          </p:nvSpPr>
-          <p:spPr>
-            <a:xfrm>
-              <a:off x="1000125" y="3657600"/>
-              <a:ext cx="4810125" cy="314325"/>
-            </a:xfrm>
-            <a:prstGeom prst="rect">
-              <a:avLst/>
-            </a:prstGeom>
-            <a:noFill/>
-            <a:ln>
-              <a:noFill/>
-            </a:ln>
-          </p:spPr>
-          <p:txBody>
-            <a:bodyPr spcFirstLastPara="1" wrap="square" lIns="0" tIns="0" rIns="0" bIns="0" anchor="t" anchorCtr="0">
-              <a:spAutoFit/>
-            </a:bodyPr>
-            <a:lstStyle/>
-            <a:p>
-              <a:pPr marL="0" marR="0" lvl="0" indent="0" algn="l" rtl="0">
-                <a:lnSpc>
-                  <a:spcPct val="150000"/>
-                </a:lnSpc>
-                <a:spcBef>
-                  <a:spcPts val="0"/>
-                </a:spcBef>
-                <a:spcAft>
-                  <a:spcPts val="0"/>
-                </a:spcAft>
-                <a:buNone/>
-              </a:pPr>
-              <a:r>
-                <a:rPr lang="en-US" sz="1650" b="0" i="0" u="none" strike="noStrike" cap="none" dirty="0">
-                  <a:solidFill>
-                    <a:srgbClr val="FFFFFF"/>
-                  </a:solidFill>
-                  <a:latin typeface="Poppins Light"/>
-                  <a:ea typeface="Poppins Light"/>
-                  <a:cs typeface="Poppins Light"/>
-                  <a:sym typeface="Poppins Light"/>
-                </a:rPr>
-                <a:t>₹4,057.7 crore lost · 297,727 complaints (2022–May 2026)</a:t>
-              </a:r>
-              <a:endParaRPr dirty="0"/>
-            </a:p>
-          </p:txBody>
-        </p:sp>
-        <p:pic>
-          <p:nvPicPr>
-            <p:cNvPr id="106" name="Google Shape;106;p14_r8" descr="image.png"/>
-            <p:cNvPicPr preferRelativeResize="0"/>
-            <p:nvPr/>
-          </p:nvPicPr>
-          <p:blipFill rotWithShape="1">
-            <a:blip r:embed="rId5">
-              <a:alphaModFix/>
-            </a:blip>
-            <a:srcRect/>
-            <a:stretch/>
-          </p:blipFill>
-          <p:spPr>
-            <a:xfrm>
-              <a:off x="571500" y="3686175"/>
-              <a:ext cx="200025" cy="247650"/>
-            </a:xfrm>
-            <a:prstGeom prst="rect">
-              <a:avLst/>
-            </a:prstGeom>
-            <a:noFill/>
-            <a:ln>
-              <a:noFill/>
-            </a:ln>
-          </p:spPr>
-        </p:pic>
-      </p:grpSp>
-      <p:grpSp>
-        <p:nvGrpSpPr>
-          <p:cNvPr id="13" name="Group 4_r9_r29">
-            <a:extLst>
-              <a:ext uri="{FF2B5EF4-FFF2-40B4-BE49-F238E27FC236}">
-                <a16:creationId xmlns:a16="http://schemas.microsoft.com/office/drawing/2014/main" id="{776B38BC-4A69-5F43-A0F5-137CD55E4FA8}"/>
-              </a:ext>
-            </a:extLst>
-          </p:cNvPr>
-          <p:cNvGrpSpPr/>
-          <p:nvPr/>
-        </p:nvGrpSpPr>
-        <p:grpSpPr>
-          <a:xfrm>
-            <a:off x="571500" y="3741263"/>
-            <a:ext cx="5238750" cy="314325"/>
-            <a:chOff x="571500" y="4210050"/>
-            <a:chExt cx="5238750" cy="314325"/>
-          </a:xfrm>
-        </p:grpSpPr>
-        <p:sp>
-          <p:nvSpPr>
-            <p:cNvPr id="102" name="Google Shape;102;p14_r10"/>
-            <p:cNvSpPr txBox="1"/>
-            <p:nvPr/>
-          </p:nvSpPr>
-          <p:spPr>
-            <a:xfrm>
-              <a:off x="1000125" y="4210050"/>
-              <a:ext cx="4810125" cy="314325"/>
-            </a:xfrm>
-            <a:prstGeom prst="rect">
-              <a:avLst/>
-            </a:prstGeom>
-            <a:noFill/>
-            <a:ln>
-              <a:noFill/>
-            </a:ln>
-          </p:spPr>
-          <p:txBody>
-            <a:bodyPr spcFirstLastPara="1" wrap="square" lIns="0" tIns="0" rIns="0" bIns="0" anchor="t" anchorCtr="0">
-              <a:spAutoFit/>
-            </a:bodyPr>
-            <a:lstStyle/>
-            <a:p>
-              <a:pPr marL="0" marR="0" lvl="0" indent="0" algn="l" rtl="0">
-                <a:lnSpc>
-                  <a:spcPct val="150000"/>
-                </a:lnSpc>
-                <a:spcBef>
-                  <a:spcPts val="0"/>
-                </a:spcBef>
-                <a:spcAft>
-                  <a:spcPts val="0"/>
-                </a:spcAft>
-                <a:buNone/>
-              </a:pPr>
-              <a:r>
-                <a:rPr lang="en-US" sz="1650" b="0" i="0" u="none" strike="noStrike" cap="none" dirty="0">
-                  <a:solidFill>
-                    <a:srgbClr val="FFFFFF"/>
-                  </a:solidFill>
-                  <a:latin typeface="Poppins Light"/>
-                  <a:ea typeface="Poppins Light"/>
-                  <a:cs typeface="Poppins Light"/>
-                  <a:sym typeface="Poppins Light"/>
-                </a:rPr>
-                <a:t>Fake 'CBI / TRAI / ED' calls: victim isolated, coerced to pay</a:t>
-              </a:r>
-              <a:endParaRPr dirty="0"/>
-            </a:p>
-          </p:txBody>
-        </p:sp>
-        <p:pic>
-          <p:nvPicPr>
-            <p:cNvPr id="107" name="Google Shape;107;p14_r11" descr="image.png"/>
-            <p:cNvPicPr preferRelativeResize="0"/>
-            <p:nvPr/>
-          </p:nvPicPr>
-          <p:blipFill rotWithShape="1">
-            <a:blip r:embed="rId5">
-              <a:alphaModFix/>
-            </a:blip>
-            <a:srcRect/>
-            <a:stretch/>
-          </p:blipFill>
-          <p:spPr>
-            <a:xfrm>
-              <a:off x="571500" y="4238625"/>
-              <a:ext cx="200025" cy="247650"/>
-            </a:xfrm>
-            <a:prstGeom prst="rect">
-              <a:avLst/>
-            </a:prstGeom>
-            <a:noFill/>
-            <a:ln>
-              <a:noFill/>
-            </a:ln>
-          </p:spPr>
-        </p:pic>
-      </p:grpSp>
-      <p:grpSp>
-        <p:nvGrpSpPr>
-          <p:cNvPr id="14" name="Group 5_r12_r30">
-            <a:extLst>
-              <a:ext uri="{FF2B5EF4-FFF2-40B4-BE49-F238E27FC236}">
-                <a16:creationId xmlns:a16="http://schemas.microsoft.com/office/drawing/2014/main" id="{CF6956BC-D0DD-126D-0DC6-421091A25E5A}"/>
-              </a:ext>
-            </a:extLst>
-          </p:cNvPr>
-          <p:cNvGrpSpPr/>
-          <p:nvPr/>
-        </p:nvGrpSpPr>
-        <p:grpSpPr>
-          <a:xfrm>
-            <a:off x="571500" y="4293713"/>
-            <a:ext cx="5238750" cy="314325"/>
-            <a:chOff x="571500" y="4762500"/>
-            <a:chExt cx="5238750" cy="314325"/>
-          </a:xfrm>
-        </p:grpSpPr>
-        <p:sp>
-          <p:nvSpPr>
-            <p:cNvPr id="103" name="Google Shape;103;p14_r13"/>
-            <p:cNvSpPr txBox="1"/>
-            <p:nvPr/>
-          </p:nvSpPr>
-          <p:spPr>
-            <a:xfrm>
-              <a:off x="1000125" y="4762500"/>
-              <a:ext cx="4810125" cy="314325"/>
-            </a:xfrm>
-            <a:prstGeom prst="rect">
-              <a:avLst/>
-            </a:prstGeom>
-            <a:noFill/>
-            <a:ln>
-              <a:noFill/>
-            </a:ln>
-          </p:spPr>
-          <p:txBody>
-            <a:bodyPr spcFirstLastPara="1" wrap="square" lIns="0" tIns="0" rIns="0" bIns="0" anchor="t" anchorCtr="0">
-              <a:spAutoFit/>
-            </a:bodyPr>
-            <a:lstStyle/>
-            <a:p>
-              <a:pPr marL="0" marR="0" lvl="0" indent="0" algn="l" rtl="0">
-                <a:lnSpc>
-                  <a:spcPct val="150000"/>
-                </a:lnSpc>
-                <a:spcBef>
-                  <a:spcPts val="0"/>
-                </a:spcBef>
-                <a:spcAft>
-                  <a:spcPts val="0"/>
-                </a:spcAft>
-                <a:buNone/>
-              </a:pPr>
-              <a:r>
-                <a:rPr lang="en-US" sz="1650" b="0" i="0" u="none" strike="noStrike" cap="none" dirty="0">
-                  <a:solidFill>
-                    <a:srgbClr val="FFFFFF"/>
-                  </a:solidFill>
-                  <a:latin typeface="Poppins Light"/>
-                  <a:ea typeface="Poppins Light"/>
-                  <a:cs typeface="Poppins Light"/>
-                  <a:sym typeface="Poppins Light"/>
-                </a:rPr>
-                <a:t>Elders = primary targets — fear + obedience exploited</a:t>
-              </a:r>
-              <a:endParaRPr dirty="0"/>
-            </a:p>
-          </p:txBody>
-        </p:sp>
-        <p:pic>
-          <p:nvPicPr>
-            <p:cNvPr id="108" name="Google Shape;108;p14_r14" descr="image.png"/>
-            <p:cNvPicPr preferRelativeResize="0"/>
-            <p:nvPr/>
-          </p:nvPicPr>
-          <p:blipFill rotWithShape="1">
-            <a:blip r:embed="rId5">
-              <a:alphaModFix/>
-            </a:blip>
-            <a:srcRect/>
-            <a:stretch/>
-          </p:blipFill>
-          <p:spPr>
-            <a:xfrm>
-              <a:off x="571500" y="4791075"/>
-              <a:ext cx="200025" cy="247650"/>
-            </a:xfrm>
-            <a:prstGeom prst="rect">
-              <a:avLst/>
-            </a:prstGeom>
-            <a:noFill/>
-            <a:ln>
-              <a:noFill/>
-            </a:ln>
-          </p:spPr>
-        </p:pic>
-      </p:grpSp>
-      <p:sp>
-        <p:nvSpPr>
-          <p:cNvPr id="115" name="Google Shape;109;p14_r15_r31"/>
-          <p:cNvSpPr txBox="1"/>
-          <p:nvPr/>
-        </p:nvSpPr>
-        <p:spPr>
-          <a:xfrm>
-            <a:off x="571500" y="571500"/>
-            <a:ext cx="11601450" cy="628650"/>
-          </a:xfrm>
-          <a:prstGeom prst="rect">
-            <a:avLst/>
-          </a:prstGeom>
-          <a:noFill/>
-          <a:ln>
-            <a:noFill/>
-          </a:ln>
-        </p:spPr>
-        <p:txBody>
-          <a:bodyPr spcFirstLastPara="1" wrap="square" lIns="0" tIns="0" rIns="0" bIns="0" anchor="t" anchorCtr="0">
-            <a:spAutoFit/>
-          </a:bodyPr>
-          <a:lstStyle/>
-          <a:p>
-            <a:pPr marL="0" marR="0" lvl="0" indent="0" algn="l" rtl="0">
-              <a:spcBef>
-                <a:spcPts val="0"/>
-              </a:spcBef>
-              <a:spcAft>
-                <a:spcPts val="0"/>
-              </a:spcAft>
-              <a:buNone/>
-            </a:pPr>
-            <a:r>
-              <a:rPr lang="en-US" sz="3600" b="1" i="0" u="none" strike="noStrike" cap="none" dirty="0">
-                <a:solidFill>
-                  <a:srgbClr val="F2EEFA"/>
-                </a:solidFill>
-                <a:latin typeface="Playfair Display"/>
-                <a:ea typeface="Playfair Display"/>
-                <a:cs typeface="Playfair Display"/>
-                <a:sym typeface="Playfair Display"/>
-              </a:rPr>
-              <a:t>PROBLEM STATEMENT</a:t>
-            </a:r>
-            <a:endParaRPr dirty="0"/>
-          </a:p>
-        </p:txBody>
-      </p:sp>
-      <p:sp>
-        <p:nvSpPr>
-          <p:cNvPr id="116" name="Google Shape;110;p14_r16_r32"/>
-          <p:cNvSpPr/>
-          <p:nvPr/>
-        </p:nvSpPr>
-        <p:spPr>
-          <a:xfrm>
-            <a:off x="571500" y="1323975"/>
-            <a:ext cx="11049000" cy="19050"/>
-          </a:xfrm>
-          <a:prstGeom prst="rect">
-            <a:avLst/>
-          </a:prstGeom>
-          <a:solidFill>
-            <a:srgbClr val="D4AF37"/>
-          </a:solidFill>
-          <a:ln>
-            <a:noFill/>
-          </a:ln>
-        </p:spPr>
-        <p:txBody>
-          <a:bodyPr spcFirstLastPara="1" wrap="square" lIns="91425" tIns="45700" rIns="91425" bIns="45700" anchor="ctr" anchorCtr="0">
-            <a:noAutofit/>
-          </a:bodyPr>
-          <a:lstStyle/>
-          <a:p>
-            <a:pPr marL="0" marR="0" lvl="0" indent="0" algn="ctr" rtl="0">
-              <a:spcBef>
-                <a:spcPts val="0"/>
-              </a:spcBef>
-              <a:spcAft>
-                <a:spcPts val="0"/>
-              </a:spcAft>
-              <a:buNone/>
-            </a:pPr>
-            <a:endParaRPr sz="1800" b="0" i="0" u="none" strike="noStrike" cap="none" dirty="0">
-              <a:solidFill>
-                <a:schemeClr val="dk1"/>
-              </a:solidFill>
-              <a:latin typeface="Calibri"/>
-              <a:ea typeface="Calibri"/>
-              <a:cs typeface="Calibri"/>
-              <a:sym typeface="Calibri"/>
-            </a:endParaRPr>
-          </a:p>
-        </p:txBody>
-      </p:sp>
-      <p:sp>
-        <p:nvSpPr>
-          <p:cNvPr id="117" name="Google Shape;111;p14_r17_r33"/>
-          <p:cNvSpPr txBox="1"/>
-          <p:nvPr/>
-        </p:nvSpPr>
-        <p:spPr>
-          <a:xfrm>
-            <a:off x="11706225" y="6467475"/>
-            <a:ext cx="200025" cy="161583"/>
-          </a:xfrm>
-          <a:prstGeom prst="rect">
-            <a:avLst/>
-          </a:prstGeom>
-          <a:noFill/>
-          <a:ln>
-            <a:noFill/>
-          </a:ln>
-        </p:spPr>
-        <p:txBody>
-          <a:bodyPr spcFirstLastPara="1" wrap="square" lIns="0" tIns="0" rIns="0" bIns="0" anchor="t" anchorCtr="0">
-            <a:spAutoFit/>
-          </a:bodyPr>
-          <a:lstStyle/>
-          <a:p>
-            <a:r>
-              <a:t>02</a:t>
-            </a:r>
-          </a:p>
-        </p:txBody>
-      </p:sp>
-      <p:pic>
-        <p:nvPicPr>
-          <p:cNvPr id="15" name="Picture 6_r18_r34">
-            <a:extLst>
-              <a:ext uri="{FF2B5EF4-FFF2-40B4-BE49-F238E27FC236}">
-                <a16:creationId xmlns:a16="http://schemas.microsoft.com/office/drawing/2014/main" id="{81D6A019-74ED-9001-54F2-BCA9F7EF5C85}"/>
-              </a:ext>
-            </a:extLst>
-          </p:cNvPr>
-          <p:cNvPicPr>
-            <a:picLocks noChangeAspect="1"/>
-          </p:cNvPicPr>
-          <p:nvPr/>
-        </p:nvPicPr>
-        <p:blipFill>
-          <a:blip r:embed="rId6"/>
-          <a:stretch>
-            <a:fillRect/>
-          </a:stretch>
-        </p:blipFill>
-        <p:spPr>
-          <a:xfrm>
-            <a:off x="9361386" y="134593"/>
-            <a:ext cx="2259114" cy="1169718"/>
-          </a:xfrm>
-          <a:prstGeom prst="rect">
-            <a:avLst/>
-          </a:prstGeom>
-        </p:spPr>
-      </p:pic>
-      <p:grpSp>
-        <p:nvGrpSpPr>
-          <p:cNvPr id="16" name="Group 5_r19_r35">
-            <a:extLst>
-              <a:ext uri="{FF2B5EF4-FFF2-40B4-BE49-F238E27FC236}">
-                <a16:creationId xmlns:a16="http://schemas.microsoft.com/office/drawing/2014/main" id="{CF6956BC-D0DD-126D-0DC6-421091A25E5A}"/>
-              </a:ext>
-            </a:extLst>
-          </p:cNvPr>
-          <p:cNvGrpSpPr/>
-          <p:nvPr/>
-        </p:nvGrpSpPr>
-        <p:grpSpPr>
-          <a:xfrm>
-            <a:off x="571500" y="4842353"/>
-            <a:ext cx="5238750" cy="314325"/>
-            <a:chOff x="571500" y="4762500"/>
-            <a:chExt cx="5238750" cy="314325"/>
-          </a:xfrm>
-        </p:grpSpPr>
-        <p:sp>
-          <p:nvSpPr>
-            <p:cNvPr id="104" name="Google Shape;103;p14_r20"/>
-            <p:cNvSpPr txBox="1"/>
-            <p:nvPr/>
-          </p:nvSpPr>
-          <p:spPr>
-            <a:xfrm>
-              <a:off x="1000125" y="4762500"/>
-              <a:ext cx="4810125" cy="314325"/>
-            </a:xfrm>
-            <a:prstGeom prst="rect">
-              <a:avLst/>
-            </a:prstGeom>
-            <a:noFill/>
-            <a:ln>
-              <a:noFill/>
-            </a:ln>
-          </p:spPr>
-          <p:txBody>
-            <a:bodyPr spcFirstLastPara="1" wrap="square" lIns="0" tIns="0" rIns="0" bIns="0" anchor="t" anchorCtr="0">
-              <a:spAutoFit/>
-            </a:bodyPr>
-            <a:lstStyle/>
-            <a:p>
-              <a:pPr marL="0" marR="0" lvl="0" indent="0" algn="l" rtl="0">
-                <a:lnSpc>
-                  <a:spcPct val="150000"/>
-                </a:lnSpc>
-                <a:spcBef>
-                  <a:spcPts val="0"/>
-                </a:spcBef>
-                <a:spcAft>
-                  <a:spcPts val="0"/>
-                </a:spcAft>
-                <a:buNone/>
-              </a:pPr>
-              <a:r>
-                <a:rPr lang="en-US" sz="1650" b="0" i="0" u="none" strike="noStrike" cap="none" dirty="0">
-                  <a:solidFill>
-                    <a:srgbClr val="FFFFFF"/>
-                  </a:solidFill>
-                  <a:latin typeface="Poppins Light"/>
-                  <a:ea typeface="Poppins Light"/>
-                  <a:cs typeface="Poppins Light"/>
-                  <a:sym typeface="Poppins Light"/>
-                </a:rPr>
-                <a:t>Losses grew 20× by 2024; every bank warns, no defense exists</a:t>
-              </a:r>
-              <a:endParaRPr dirty="0"/>
-            </a:p>
-          </p:txBody>
-        </p:sp>
-        <p:pic>
-          <p:nvPicPr>
-            <p:cNvPr id="112" name="Google Shape;108;p14_r21" descr="image.png"/>
-            <p:cNvPicPr preferRelativeResize="0"/>
-            <p:nvPr/>
-          </p:nvPicPr>
-          <p:blipFill rotWithShape="1">
-            <a:blip r:embed="rId5">
-              <a:alphaModFix/>
-            </a:blip>
-            <a:srcRect/>
-            <a:stretch/>
-          </p:blipFill>
-          <p:spPr>
-            <a:xfrm>
-              <a:off x="571500" y="4791075"/>
-              <a:ext cx="200025" cy="247650"/>
-            </a:xfrm>
-            <a:prstGeom prst="rect">
-              <a:avLst/>
-            </a:prstGeom>
-            <a:noFill/>
-            <a:ln>
-              <a:noFill/>
-            </a:ln>
-          </p:spPr>
-        </p:pic>
-      </p:grpSp>
-      <p:grpSp>
-        <p:nvGrpSpPr>
-          <p:cNvPr id="17" name="Group 5_r22_r36">
-            <a:extLst>
-              <a:ext uri="{FF2B5EF4-FFF2-40B4-BE49-F238E27FC236}">
-                <a16:creationId xmlns:a16="http://schemas.microsoft.com/office/drawing/2014/main" id="{CF6956BC-D0DD-126D-0DC6-421091A25E5A}"/>
-              </a:ext>
-            </a:extLst>
-          </p:cNvPr>
-          <p:cNvGrpSpPr/>
-          <p:nvPr/>
-        </p:nvGrpSpPr>
-        <p:grpSpPr>
-          <a:xfrm>
-            <a:off x="571500" y="5390993"/>
-            <a:ext cx="5238750" cy="314325"/>
-            <a:chOff x="571500" y="4762500"/>
-            <a:chExt cx="5238750" cy="314325"/>
-          </a:xfrm>
-        </p:grpSpPr>
-        <p:sp>
-          <p:nvSpPr>
-            <p:cNvPr id="113" name="Google Shape;103;p14_r23"/>
-            <p:cNvSpPr txBox="1"/>
-            <p:nvPr/>
-          </p:nvSpPr>
-          <p:spPr>
-            <a:xfrm>
-              <a:off x="1000125" y="4762500"/>
-              <a:ext cx="4810125" cy="314325"/>
-            </a:xfrm>
-            <a:prstGeom prst="rect">
-              <a:avLst/>
-            </a:prstGeom>
-            <a:noFill/>
-            <a:ln>
-              <a:noFill/>
-            </a:ln>
-          </p:spPr>
-          <p:txBody>
-            <a:bodyPr spcFirstLastPara="1" wrap="square" lIns="0" tIns="0" rIns="0" bIns="0" anchor="t" anchorCtr="0">
-              <a:spAutoFit/>
-            </a:bodyPr>
-            <a:lstStyle/>
-            <a:p>
-              <a:pPr marL="0" marR="0" lvl="0" indent="0" algn="l" rtl="0">
-                <a:lnSpc>
-                  <a:spcPct val="150000"/>
-                </a:lnSpc>
-                <a:spcBef>
-                  <a:spcPts val="0"/>
-                </a:spcBef>
-                <a:spcAft>
-                  <a:spcPts val="0"/>
-                </a:spcAft>
-                <a:buNone/>
-              </a:pPr>
-              <a:r>
-                <a:rPr lang="en-US" sz="1650" b="0" i="0" u="none" strike="noStrike" cap="none" dirty="0">
-                  <a:solidFill>
-                    <a:srgbClr val="FFFFFF"/>
-                  </a:solidFill>
-                  <a:latin typeface="Poppins Light"/>
-                  <a:ea typeface="Poppins Light"/>
-                  <a:cs typeface="Poppins Light"/>
-                  <a:sym typeface="Poppins Light"/>
-                </a:rPr>
-                <a:t>Fraud completes at ONE moment: the UPI payment — unguarded</a:t>
-              </a:r>
-              <a:endParaRPr dirty="0"/>
-            </a:p>
-          </p:txBody>
-        </p:sp>
-        <p:pic>
-          <p:nvPicPr>
-            <p:cNvPr id="114" name="Google Shape;108;p14_r24" descr="image.png"/>
-            <p:cNvPicPr preferRelativeResize="0"/>
-            <p:nvPr/>
-          </p:nvPicPr>
-          <p:blipFill rotWithShape="1">
-            <a:blip r:embed="rId5">
-              <a:alphaModFix/>
-            </a:blip>
-            <a:srcRect/>
-            <a:stretch/>
-          </p:blipFill>
-          <p:spPr>
-            <a:xfrm>
-              <a:off x="571500" y="4791075"/>
-              <a:ext cx="200025" cy="247650"/>
-            </a:xfrm>
-            <a:prstGeom prst="rect">
-              <a:avLst/>
-            </a:prstGeom>
-            <a:noFill/>
-            <a:ln>
-              <a:noFill/>
-            </a:ln>
-          </p:spPr>
-        </p:pic>
-      </p:grpSp>
-    </p:spTree>
-  </p:cSld>
-  <p:clrMapOvr>
-    <a:masterClrMapping/>
-  </p:clrMapOvr>
-</p:sld>
-</file>
-
-<file path=ppt/slides/slide3.xml><?xml version="1.0" encoding="utf-8"?>
-<p:sld xmlns:a="http://schemas.openxmlformats.org/drawingml/2006/main" xmlns:r="http://schemas.openxmlformats.org/officeDocument/2006/relationships" xmlns:p="http://schemas.openxmlformats.org/presentationml/2006/main">
-  <p:cSld>
-    <p:spTree>
-      <p:nvGrpSpPr>
-        <p:cNvPr id="1" name="Shape 97"/>
-        <p:cNvGrpSpPr/>
-        <p:nvPr/>
-      </p:nvGrpSpPr>
-      <p:grpSpPr>
-        <a:xfrm>
-          <a:off x="0" y="0"/>
-          <a:ext cx="0" cy="0"/>
-          <a:chOff x="0" y="0"/>
-          <a:chExt cx="0" cy="0"/>
-        </a:xfrm>
-      </p:grpSpPr>
-      <p:pic>
-        <p:nvPicPr>
-          <p:cNvPr id="10" name="Google Shape;84;p13_r1_r25" descr="image.png">
-            <a:extLst>
-              <a:ext uri="{FF2B5EF4-FFF2-40B4-BE49-F238E27FC236}">
-                <a16:creationId xmlns:a16="http://schemas.microsoft.com/office/drawing/2014/main" id="{A7427FBB-6B82-28C2-C807-6A3DF49A1F1A}"/>
-              </a:ext>
-            </a:extLst>
-          </p:cNvPr>
-          <p:cNvPicPr preferRelativeResize="0"/>
-          <p:nvPr/>
-        </p:nvPicPr>
-        <p:blipFill rotWithShape="1">
-          <a:blip r:embed="rId3">
-            <a:alphaModFix/>
-          </a:blip>
-          <a:srcRect/>
-          <a:stretch/>
-        </p:blipFill>
-        <p:spPr>
-          <a:xfrm>
-            <a:off x="-157315" y="-88489"/>
-            <a:ext cx="12457469" cy="7007326"/>
-          </a:xfrm>
-          <a:prstGeom prst="rect">
-            <a:avLst/>
-          </a:prstGeom>
-          <a:noFill/>
-          <a:ln>
-            <a:noFill/>
-          </a:ln>
-        </p:spPr>
-      </p:pic>
-      <p:pic>
-        <p:nvPicPr>
-          <p:cNvPr id="99" name="Google Shape;98;p14_r2_r26" descr="image.png"/>
-          <p:cNvPicPr preferRelativeResize="0"/>
-          <p:nvPr/>
-        </p:nvPicPr>
-        <p:blipFill rotWithShape="1">
-          <a:blip r:embed="rId4">
-            <a:alphaModFix amt="50000"/>
-          </a:blip>
-          <a:srcRect/>
-          <a:stretch/>
-        </p:blipFill>
-        <p:spPr>
-          <a:xfrm>
-            <a:off x="0" y="0"/>
-            <a:ext cx="12192000" cy="6858000"/>
-          </a:xfrm>
-          <a:prstGeom prst="rect">
-            <a:avLst/>
-          </a:prstGeom>
-          <a:noFill/>
-          <a:ln>
-            <a:noFill/>
-          </a:ln>
-        </p:spPr>
-      </p:pic>
-      <p:grpSp>
-        <p:nvGrpSpPr>
-          <p:cNvPr id="11" name="Group 2_r3_r27">
-            <a:extLst>
-              <a:ext uri="{FF2B5EF4-FFF2-40B4-BE49-F238E27FC236}">
-                <a16:creationId xmlns:a16="http://schemas.microsoft.com/office/drawing/2014/main" id="{A73E524B-A1B2-0008-AF1C-66E70946F0B4}"/>
-              </a:ext>
-            </a:extLst>
-          </p:cNvPr>
-          <p:cNvGrpSpPr/>
-          <p:nvPr/>
-        </p:nvGrpSpPr>
-        <p:grpSpPr>
-          <a:xfrm>
-            <a:off x="571500" y="2658491"/>
-            <a:ext cx="10977715" cy="380873"/>
-            <a:chOff x="571500" y="2719451"/>
-            <a:chExt cx="10977715" cy="380873"/>
-          </a:xfrm>
-        </p:grpSpPr>
-        <p:sp>
-          <p:nvSpPr>
-            <p:cNvPr id="100" name="Google Shape;100;p14_r4"/>
-            <p:cNvSpPr txBox="1"/>
-            <p:nvPr/>
-          </p:nvSpPr>
-          <p:spPr>
-            <a:xfrm>
-              <a:off x="928840" y="2719451"/>
-              <a:ext cx="10620375" cy="380873"/>
-            </a:xfrm>
-            <a:prstGeom prst="rect">
-              <a:avLst/>
-            </a:prstGeom>
-            <a:noFill/>
-            <a:ln>
-              <a:noFill/>
-            </a:ln>
-          </p:spPr>
-          <p:txBody>
-            <a:bodyPr spcFirstLastPara="1" wrap="square" lIns="0" tIns="0" rIns="0" bIns="0" anchor="t" anchorCtr="0">
-              <a:spAutoFit/>
-            </a:bodyPr>
-            <a:lstStyle/>
-            <a:p>
-              <a:pPr marL="0" marR="0" lvl="0" indent="0" algn="l" rtl="0">
-                <a:lnSpc>
-                  <a:spcPct val="150000"/>
-                </a:lnSpc>
-                <a:spcBef>
-                  <a:spcPts val="0"/>
-                </a:spcBef>
-                <a:spcAft>
-                  <a:spcPts val="0"/>
-                </a:spcAft>
-                <a:buNone/>
-              </a:pPr>
-              <a:r>
-                <a:rPr lang="en-US" sz="1650" b="0" i="0" u="none" strike="noStrike" cap="none" dirty="0">
-                  <a:solidFill>
-                    <a:srgbClr val="FFFFFF"/>
-                  </a:solidFill>
-                  <a:latin typeface="Poppins Light"/>
-                  <a:ea typeface="Poppins Light"/>
-                  <a:cs typeface="Poppins Light"/>
-                  <a:sym typeface="Poppins Light"/>
-                </a:rPr>
-                <a:t>PROPOSED SOLUTION</a:t>
-              </a:r>
-              <a:endParaRPr dirty="0"/>
-            </a:p>
-          </p:txBody>
-        </p:sp>
-        <p:pic>
-          <p:nvPicPr>
-            <p:cNvPr id="105" name="Google Shape;105;p14_r5" descr="image.png"/>
-            <p:cNvPicPr preferRelativeResize="0"/>
-            <p:nvPr/>
-          </p:nvPicPr>
-          <p:blipFill rotWithShape="1">
-            <a:blip r:embed="rId5">
-              <a:alphaModFix/>
-            </a:blip>
-            <a:srcRect/>
-            <a:stretch/>
-          </p:blipFill>
-          <p:spPr>
-            <a:xfrm>
-              <a:off x="571500" y="2819400"/>
-              <a:ext cx="200025" cy="247650"/>
-            </a:xfrm>
-            <a:prstGeom prst="rect">
-              <a:avLst/>
-            </a:prstGeom>
-            <a:noFill/>
-            <a:ln>
-              <a:noFill/>
-            </a:ln>
-          </p:spPr>
-        </p:pic>
-      </p:grpSp>
-      <p:grpSp>
-        <p:nvGrpSpPr>
-          <p:cNvPr id="12" name="Group 3_r6_r28">
-            <a:extLst>
-              <a:ext uri="{FF2B5EF4-FFF2-40B4-BE49-F238E27FC236}">
-                <a16:creationId xmlns:a16="http://schemas.microsoft.com/office/drawing/2014/main" id="{8BDCEEF2-B973-65CB-4419-90818D61867D}"/>
-              </a:ext>
-            </a:extLst>
-          </p:cNvPr>
-          <p:cNvGrpSpPr/>
-          <p:nvPr/>
-        </p:nvGrpSpPr>
-        <p:grpSpPr>
-          <a:xfrm>
-            <a:off x="571500" y="3188813"/>
-            <a:ext cx="5238750" cy="314325"/>
-            <a:chOff x="571500" y="3657600"/>
-            <a:chExt cx="5238750" cy="314325"/>
-          </a:xfrm>
-        </p:grpSpPr>
-        <p:sp>
-          <p:nvSpPr>
-            <p:cNvPr id="101" name="Google Shape;101;p14_r7"/>
-            <p:cNvSpPr txBox="1"/>
-            <p:nvPr/>
-          </p:nvSpPr>
-          <p:spPr>
-            <a:xfrm>
-              <a:off x="1000125" y="3657600"/>
-              <a:ext cx="4810125" cy="314325"/>
-            </a:xfrm>
-            <a:prstGeom prst="rect">
-              <a:avLst/>
-            </a:prstGeom>
-            <a:noFill/>
-            <a:ln>
-              <a:noFill/>
-            </a:ln>
-          </p:spPr>
-          <p:txBody>
-            <a:bodyPr spcFirstLastPara="1" wrap="square" lIns="0" tIns="0" rIns="0" bIns="0" anchor="t" anchorCtr="0">
-              <a:spAutoFit/>
-            </a:bodyPr>
-            <a:lstStyle/>
-            <a:p>
-              <a:pPr marL="0" marR="0" lvl="0" indent="0" algn="l" rtl="0">
-                <a:lnSpc>
-                  <a:spcPct val="150000"/>
-                </a:lnSpc>
-                <a:spcBef>
-                  <a:spcPts val="0"/>
-                </a:spcBef>
-                <a:spcAft>
-                  <a:spcPts val="0"/>
-                </a:spcAft>
-                <a:buNone/>
-              </a:pPr>
-              <a:r>
-                <a:rPr lang="en-US" sz="1650" b="0" i="0" u="none" strike="noStrike" cap="none" dirty="0">
-                  <a:solidFill>
-                    <a:srgbClr val="FFFFFF"/>
-                  </a:solidFill>
-                  <a:latin typeface="Poppins Light"/>
-                  <a:ea typeface="Poppins Light"/>
-                  <a:cs typeface="Poppins Light"/>
-                  <a:sym typeface="Poppins Light"/>
-                </a:rPr>
-                <a:t>On-call AI flags scam language + pressure (Hindi first)</a:t>
-              </a:r>
-              <a:endParaRPr dirty="0"/>
-            </a:p>
-          </p:txBody>
-        </p:sp>
-        <p:pic>
-          <p:nvPicPr>
-            <p:cNvPr id="106" name="Google Shape;106;p14_r8" descr="image.png"/>
-            <p:cNvPicPr preferRelativeResize="0"/>
-            <p:nvPr/>
-          </p:nvPicPr>
-          <p:blipFill rotWithShape="1">
-            <a:blip r:embed="rId5">
-              <a:alphaModFix/>
-            </a:blip>
-            <a:srcRect/>
-            <a:stretch/>
-          </p:blipFill>
-          <p:spPr>
-            <a:xfrm>
-              <a:off x="571500" y="3686175"/>
-              <a:ext cx="200025" cy="247650"/>
-            </a:xfrm>
-            <a:prstGeom prst="rect">
-              <a:avLst/>
-            </a:prstGeom>
-            <a:noFill/>
-            <a:ln>
-              <a:noFill/>
-            </a:ln>
-          </p:spPr>
-        </p:pic>
-      </p:grpSp>
-      <p:grpSp>
-        <p:nvGrpSpPr>
-          <p:cNvPr id="13" name="Group 4_r9_r29">
-            <a:extLst>
-              <a:ext uri="{FF2B5EF4-FFF2-40B4-BE49-F238E27FC236}">
-                <a16:creationId xmlns:a16="http://schemas.microsoft.com/office/drawing/2014/main" id="{776B38BC-4A69-5F43-A0F5-137CD55E4FA8}"/>
-              </a:ext>
-            </a:extLst>
-          </p:cNvPr>
-          <p:cNvGrpSpPr/>
-          <p:nvPr/>
-        </p:nvGrpSpPr>
-        <p:grpSpPr>
-          <a:xfrm>
-            <a:off x="571500" y="3741263"/>
-            <a:ext cx="5238750" cy="314325"/>
-            <a:chOff x="571500" y="4210050"/>
-            <a:chExt cx="5238750" cy="314325"/>
-          </a:xfrm>
-        </p:grpSpPr>
-        <p:sp>
-          <p:nvSpPr>
-            <p:cNvPr id="102" name="Google Shape;102;p14_r10"/>
-            <p:cNvSpPr txBox="1"/>
-            <p:nvPr/>
-          </p:nvSpPr>
-          <p:spPr>
-            <a:xfrm>
-              <a:off x="1000125" y="4210050"/>
-              <a:ext cx="4810125" cy="314325"/>
-            </a:xfrm>
-            <a:prstGeom prst="rect">
-              <a:avLst/>
-            </a:prstGeom>
-            <a:noFill/>
-            <a:ln>
-              <a:noFill/>
-            </a:ln>
-          </p:spPr>
-          <p:txBody>
-            <a:bodyPr spcFirstLastPara="1" wrap="square" lIns="0" tIns="0" rIns="0" bIns="0" anchor="t" anchorCtr="0">
-              <a:spAutoFit/>
-            </a:bodyPr>
-            <a:lstStyle/>
-            <a:p>
-              <a:pPr marL="0" marR="0" lvl="0" indent="0" algn="l" rtl="0">
-                <a:lnSpc>
-                  <a:spcPct val="150000"/>
-                </a:lnSpc>
-                <a:spcBef>
-                  <a:spcPts val="0"/>
-                </a:spcBef>
-                <a:spcAft>
-                  <a:spcPts val="0"/>
-                </a:spcAft>
-                <a:buNone/>
-              </a:pPr>
-              <a:r>
-                <a:rPr lang="en-US" sz="1650" b="0" i="0" u="none" strike="noStrike" cap="none" dirty="0">
-                  <a:solidFill>
-                    <a:srgbClr val="FFFFFF"/>
-                  </a:solidFill>
-                  <a:latin typeface="Poppins Light"/>
-                  <a:ea typeface="Poppins Light"/>
-                  <a:cs typeface="Poppins Light"/>
-                  <a:sym typeface="Poppins Light"/>
-                </a:rPr>
-                <a:t>PAUSE at the payment moment: warn + family confirmation before PIN</a:t>
-              </a:r>
-              <a:endParaRPr dirty="0"/>
-            </a:p>
-          </p:txBody>
-        </p:sp>
-        <p:pic>
-          <p:nvPicPr>
-            <p:cNvPr id="107" name="Google Shape;107;p14_r11" descr="image.png"/>
-            <p:cNvPicPr preferRelativeResize="0"/>
-            <p:nvPr/>
-          </p:nvPicPr>
-          <p:blipFill rotWithShape="1">
-            <a:blip r:embed="rId5">
-              <a:alphaModFix/>
-            </a:blip>
-            <a:srcRect/>
-            <a:stretch/>
-          </p:blipFill>
-          <p:spPr>
-            <a:xfrm>
-              <a:off x="571500" y="4238625"/>
-              <a:ext cx="200025" cy="247650"/>
-            </a:xfrm>
-            <a:prstGeom prst="rect">
-              <a:avLst/>
-            </a:prstGeom>
-            <a:noFill/>
-            <a:ln>
-              <a:noFill/>
-            </a:ln>
-          </p:spPr>
-        </p:pic>
-      </p:grpSp>
-      <p:grpSp>
-        <p:nvGrpSpPr>
-          <p:cNvPr id="14" name="Group 5_r12_r30">
-            <a:extLst>
-              <a:ext uri="{FF2B5EF4-FFF2-40B4-BE49-F238E27FC236}">
-                <a16:creationId xmlns:a16="http://schemas.microsoft.com/office/drawing/2014/main" id="{CF6956BC-D0DD-126D-0DC6-421091A25E5A}"/>
-              </a:ext>
-            </a:extLst>
-          </p:cNvPr>
-          <p:cNvGrpSpPr/>
-          <p:nvPr/>
-        </p:nvGrpSpPr>
-        <p:grpSpPr>
-          <a:xfrm>
-            <a:off x="571500" y="4293713"/>
-            <a:ext cx="5238750" cy="314325"/>
-            <a:chOff x="571500" y="4762500"/>
-            <a:chExt cx="5238750" cy="314325"/>
-          </a:xfrm>
-        </p:grpSpPr>
-        <p:sp>
-          <p:nvSpPr>
-            <p:cNvPr id="103" name="Google Shape;103;p14_r13"/>
-            <p:cNvSpPr txBox="1"/>
-            <p:nvPr/>
-          </p:nvSpPr>
-          <p:spPr>
-            <a:xfrm>
-              <a:off x="1000125" y="4762500"/>
-              <a:ext cx="4810125" cy="314325"/>
-            </a:xfrm>
-            <a:prstGeom prst="rect">
-              <a:avLst/>
-            </a:prstGeom>
-            <a:noFill/>
-            <a:ln>
-              <a:noFill/>
-            </a:ln>
-          </p:spPr>
-          <p:txBody>
-            <a:bodyPr spcFirstLastPara="1" wrap="square" lIns="0" tIns="0" rIns="0" bIns="0" anchor="t" anchorCtr="0">
-              <a:spAutoFit/>
-            </a:bodyPr>
-            <a:lstStyle/>
-            <a:p>
-              <a:pPr marL="0" marR="0" lvl="0" indent="0" algn="l" rtl="0">
-                <a:lnSpc>
-                  <a:spcPct val="150000"/>
-                </a:lnSpc>
-                <a:spcBef>
-                  <a:spcPts val="0"/>
-                </a:spcBef>
-                <a:spcAft>
-                  <a:spcPts val="0"/>
-                </a:spcAft>
-                <a:buNone/>
-              </a:pPr>
-              <a:r>
-                <a:rPr lang="en-US" sz="1650" b="0" i="0" u="none" strike="noStrike" cap="none" dirty="0">
-                  <a:solidFill>
-                    <a:srgbClr val="FFFFFF"/>
-                  </a:solidFill>
-                  <a:latin typeface="Poppins Light"/>
-                  <a:ea typeface="Poppins Light"/>
-                  <a:cs typeface="Poppins Light"/>
-                  <a:sym typeface="Poppins Light"/>
-                </a:rPr>
-                <a:t>One-tap verified report to 1930 / Chakshu, tamper-proof evidence</a:t>
-              </a:r>
-              <a:endParaRPr dirty="0"/>
-            </a:p>
-          </p:txBody>
-        </p:sp>
-        <p:pic>
-          <p:nvPicPr>
-            <p:cNvPr id="108" name="Google Shape;108;p14_r14" descr="image.png"/>
-            <p:cNvPicPr preferRelativeResize="0"/>
-            <p:nvPr/>
-          </p:nvPicPr>
-          <p:blipFill rotWithShape="1">
-            <a:blip r:embed="rId5">
-              <a:alphaModFix/>
-            </a:blip>
-            <a:srcRect/>
-            <a:stretch/>
-          </p:blipFill>
-          <p:spPr>
-            <a:xfrm>
-              <a:off x="571500" y="4791075"/>
-              <a:ext cx="200025" cy="247650"/>
-            </a:xfrm>
-            <a:prstGeom prst="rect">
-              <a:avLst/>
-            </a:prstGeom>
-            <a:noFill/>
-            <a:ln>
-              <a:noFill/>
-            </a:ln>
-          </p:spPr>
-        </p:pic>
-      </p:grpSp>
-      <p:sp>
-        <p:nvSpPr>
-          <p:cNvPr id="115" name="Google Shape;109;p14_r15_r31"/>
-          <p:cNvSpPr txBox="1"/>
-          <p:nvPr/>
-        </p:nvSpPr>
-        <p:spPr>
-          <a:xfrm>
-            <a:off x="571500" y="571500"/>
-            <a:ext cx="11601450" cy="628650"/>
-          </a:xfrm>
-          <a:prstGeom prst="rect">
-            <a:avLst/>
-          </a:prstGeom>
-          <a:noFill/>
-          <a:ln>
-            <a:noFill/>
-          </a:ln>
-        </p:spPr>
-        <p:txBody>
-          <a:bodyPr spcFirstLastPara="1" wrap="square" lIns="0" tIns="0" rIns="0" bIns="0" anchor="t" anchorCtr="0">
-            <a:spAutoFit/>
-          </a:bodyPr>
-          <a:lstStyle/>
-          <a:p>
-            <a:pPr marL="0" marR="0" lvl="0" indent="0" algn="l" rtl="0">
-              <a:spcBef>
-                <a:spcPts val="0"/>
-              </a:spcBef>
-              <a:spcAft>
-                <a:spcPts val="0"/>
-              </a:spcAft>
-              <a:buNone/>
-            </a:pPr>
-            <a:r>
-              <a:rPr lang="en-US" sz="3600" b="1" i="0" u="none" strike="noStrike" cap="none" dirty="0">
-                <a:solidFill>
-                  <a:srgbClr val="F2EEFA"/>
-                </a:solidFill>
-                <a:latin typeface="Playfair Display"/>
-                <a:ea typeface="Playfair Display"/>
-                <a:cs typeface="Playfair Display"/>
-                <a:sym typeface="Playfair Display"/>
-              </a:rPr>
-              <a:t>KAVACH — RECOGNIZE → INTERRUPT →</a:t>
-            </a:r>
-            <a:endParaRPr dirty="0"/>
-          </a:p>
-          <a:p>
-            <a:r>
-              <a:rPr>
-                <a:solidFill>
-                  <a:srgbClr val="FFFFFF"/>
-                </a:solidFill>
-              </a:rPr>
-              <a:t>VERIFY → PACKAGE → REPORT</a:t>
-            </a:r>
-          </a:p>
-        </p:txBody>
-      </p:sp>
-      <p:sp>
-        <p:nvSpPr>
-          <p:cNvPr id="116" name="Google Shape;110;p14_r16_r32"/>
-          <p:cNvSpPr/>
-          <p:nvPr/>
-        </p:nvSpPr>
-        <p:spPr>
-          <a:xfrm>
-            <a:off x="571500" y="1323975"/>
-            <a:ext cx="11049000" cy="19050"/>
-          </a:xfrm>
-          <a:prstGeom prst="rect">
-            <a:avLst/>
-          </a:prstGeom>
-          <a:solidFill>
-            <a:srgbClr val="D4AF37"/>
-          </a:solidFill>
-          <a:ln>
-            <a:noFill/>
-          </a:ln>
-        </p:spPr>
-        <p:txBody>
-          <a:bodyPr spcFirstLastPara="1" wrap="square" lIns="91425" tIns="45700" rIns="91425" bIns="45700" anchor="ctr" anchorCtr="0">
-            <a:noAutofit/>
-          </a:bodyPr>
-          <a:lstStyle/>
-          <a:p>
-            <a:pPr marL="0" marR="0" lvl="0" indent="0" algn="ctr" rtl="0">
-              <a:spcBef>
-                <a:spcPts val="0"/>
-              </a:spcBef>
-              <a:spcAft>
-                <a:spcPts val="0"/>
-              </a:spcAft>
-              <a:buNone/>
-            </a:pPr>
-            <a:endParaRPr sz="1800" b="0" i="0" u="none" strike="noStrike" cap="none" dirty="0">
-              <a:solidFill>
-                <a:schemeClr val="dk1"/>
-              </a:solidFill>
-              <a:latin typeface="Calibri"/>
-              <a:ea typeface="Calibri"/>
-              <a:cs typeface="Calibri"/>
-              <a:sym typeface="Calibri"/>
-            </a:endParaRPr>
-          </a:p>
-        </p:txBody>
-      </p:sp>
-      <p:sp>
-        <p:nvSpPr>
-          <p:cNvPr id="117" name="Google Shape;111;p14_r17_r33"/>
-          <p:cNvSpPr txBox="1"/>
-          <p:nvPr/>
-        </p:nvSpPr>
-        <p:spPr>
-          <a:xfrm>
-            <a:off x="11706225" y="6467475"/>
-            <a:ext cx="200025" cy="161583"/>
-          </a:xfrm>
-          <a:prstGeom prst="rect">
-            <a:avLst/>
-          </a:prstGeom>
-          <a:noFill/>
-          <a:ln>
-            <a:noFill/>
-          </a:ln>
-        </p:spPr>
-        <p:txBody>
-          <a:bodyPr spcFirstLastPara="1" wrap="square" lIns="0" tIns="0" rIns="0" bIns="0" anchor="t" anchorCtr="0">
-            <a:spAutoFit/>
-          </a:bodyPr>
-          <a:lstStyle/>
-          <a:p>
-            <a:r>
-              <a:t>03</a:t>
-            </a:r>
-          </a:p>
-        </p:txBody>
-      </p:sp>
-      <p:pic>
-        <p:nvPicPr>
-          <p:cNvPr id="15" name="Picture 6_r18_r34">
-            <a:extLst>
-              <a:ext uri="{FF2B5EF4-FFF2-40B4-BE49-F238E27FC236}">
-                <a16:creationId xmlns:a16="http://schemas.microsoft.com/office/drawing/2014/main" id="{81D6A019-74ED-9001-54F2-BCA9F7EF5C85}"/>
-              </a:ext>
-            </a:extLst>
-          </p:cNvPr>
-          <p:cNvPicPr>
-            <a:picLocks noChangeAspect="1"/>
-          </p:cNvPicPr>
-          <p:nvPr/>
-        </p:nvPicPr>
-        <p:blipFill>
-          <a:blip r:embed="rId6"/>
-          <a:stretch>
-            <a:fillRect/>
-          </a:stretch>
-        </p:blipFill>
-        <p:spPr>
-          <a:xfrm>
-            <a:off x="9361386" y="134593"/>
-            <a:ext cx="2259114" cy="1169718"/>
-          </a:xfrm>
-          <a:prstGeom prst="rect">
-            <a:avLst/>
-          </a:prstGeom>
-        </p:spPr>
-      </p:pic>
-      <p:grpSp>
-        <p:nvGrpSpPr>
-          <p:cNvPr id="16" name="Group 5_r19_r35">
-            <a:extLst>
-              <a:ext uri="{FF2B5EF4-FFF2-40B4-BE49-F238E27FC236}">
-                <a16:creationId xmlns:a16="http://schemas.microsoft.com/office/drawing/2014/main" id="{CF6956BC-D0DD-126D-0DC6-421091A25E5A}"/>
-              </a:ext>
-            </a:extLst>
-          </p:cNvPr>
-          <p:cNvGrpSpPr/>
-          <p:nvPr/>
-        </p:nvGrpSpPr>
-        <p:grpSpPr>
-          <a:xfrm>
-            <a:off x="571500" y="4842353"/>
-            <a:ext cx="5238750" cy="314325"/>
-            <a:chOff x="571500" y="4762500"/>
-            <a:chExt cx="5238750" cy="314325"/>
-          </a:xfrm>
-        </p:grpSpPr>
-        <p:sp>
-          <p:nvSpPr>
-            <p:cNvPr id="104" name="Google Shape;103;p14_r20"/>
-            <p:cNvSpPr txBox="1"/>
-            <p:nvPr/>
-          </p:nvSpPr>
-          <p:spPr>
-            <a:xfrm>
-              <a:off x="1000125" y="4762500"/>
-              <a:ext cx="4810125" cy="314325"/>
-            </a:xfrm>
-            <a:prstGeom prst="rect">
-              <a:avLst/>
-            </a:prstGeom>
-            <a:noFill/>
-            <a:ln>
-              <a:noFill/>
-            </a:ln>
-          </p:spPr>
-          <p:txBody>
-            <a:bodyPr spcFirstLastPara="1" wrap="square" lIns="0" tIns="0" rIns="0" bIns="0" anchor="t" anchorCtr="0">
-              <a:spAutoFit/>
-            </a:bodyPr>
-            <a:lstStyle/>
-            <a:p>
-              <a:pPr marL="0" marR="0" lvl="0" indent="0" algn="l" rtl="0">
-                <a:lnSpc>
-                  <a:spcPct val="150000"/>
-                </a:lnSpc>
-                <a:spcBef>
-                  <a:spcPts val="0"/>
-                </a:spcBef>
-                <a:spcAft>
-                  <a:spcPts val="0"/>
-                </a:spcAft>
-                <a:buNone/>
-              </a:pPr>
-              <a:r>
-                <a:rPr lang="en-US" sz="1650" b="0" i="0" u="none" strike="noStrike" cap="none" dirty="0">
-                  <a:solidFill>
-                    <a:srgbClr val="FFFFFF"/>
-                  </a:solidFill>
-                  <a:latin typeface="Poppins Light"/>
-                  <a:ea typeface="Poppins Light"/>
-                  <a:cs typeface="Poppins Light"/>
-                  <a:sym typeface="Poppins Light"/>
-                </a:rPr>
-                <a:t>How it solves: owns the seconds between 'scam' and 'money moved'</a:t>
-              </a:r>
-              <a:endParaRPr dirty="0"/>
-            </a:p>
-          </p:txBody>
-        </p:sp>
-        <p:pic>
-          <p:nvPicPr>
-            <p:cNvPr id="112" name="Google Shape;108;p14_r21" descr="image.png"/>
-            <p:cNvPicPr preferRelativeResize="0"/>
-            <p:nvPr/>
-          </p:nvPicPr>
-          <p:blipFill rotWithShape="1">
-            <a:blip r:embed="rId5">
-              <a:alphaModFix/>
-            </a:blip>
-            <a:srcRect/>
-            <a:stretch/>
-          </p:blipFill>
-          <p:spPr>
-            <a:xfrm>
-              <a:off x="571500" y="4791075"/>
-              <a:ext cx="200025" cy="247650"/>
-            </a:xfrm>
-            <a:prstGeom prst="rect">
-              <a:avLst/>
-            </a:prstGeom>
-            <a:noFill/>
-            <a:ln>
-              <a:noFill/>
-            </a:ln>
-          </p:spPr>
-        </p:pic>
-      </p:grpSp>
-      <p:grpSp>
-        <p:nvGrpSpPr>
-          <p:cNvPr id="17" name="Group 5_r22_r36">
-            <a:extLst>
-              <a:ext uri="{FF2B5EF4-FFF2-40B4-BE49-F238E27FC236}">
-                <a16:creationId xmlns:a16="http://schemas.microsoft.com/office/drawing/2014/main" id="{CF6956BC-D0DD-126D-0DC6-421091A25E5A}"/>
-              </a:ext>
-            </a:extLst>
-          </p:cNvPr>
-          <p:cNvGrpSpPr/>
-          <p:nvPr/>
-        </p:nvGrpSpPr>
-        <p:grpSpPr>
-          <a:xfrm>
-            <a:off x="571500" y="5390993"/>
-            <a:ext cx="5238750" cy="314325"/>
-            <a:chOff x="571500" y="4762500"/>
-            <a:chExt cx="5238750" cy="314325"/>
-          </a:xfrm>
-        </p:grpSpPr>
-        <p:sp>
-          <p:nvSpPr>
-            <p:cNvPr id="113" name="Google Shape;103;p14_r23"/>
-            <p:cNvSpPr txBox="1"/>
-            <p:nvPr/>
-          </p:nvSpPr>
-          <p:spPr>
-            <a:xfrm>
-              <a:off x="1000125" y="4762500"/>
-              <a:ext cx="4810125" cy="314325"/>
-            </a:xfrm>
-            <a:prstGeom prst="rect">
-              <a:avLst/>
-            </a:prstGeom>
-            <a:noFill/>
-            <a:ln>
-              <a:noFill/>
-            </a:ln>
-          </p:spPr>
-          <p:txBody>
-            <a:bodyPr spcFirstLastPara="1" wrap="square" lIns="0" tIns="0" rIns="0" bIns="0" anchor="t" anchorCtr="0">
-              <a:spAutoFit/>
-            </a:bodyPr>
-            <a:lstStyle/>
-            <a:p>
-              <a:pPr marL="0" marR="0" lvl="0" indent="0" algn="l" rtl="0">
-                <a:lnSpc>
-                  <a:spcPct val="150000"/>
-                </a:lnSpc>
-                <a:spcBef>
-                  <a:spcPts val="0"/>
-                </a:spcBef>
-                <a:spcAft>
-                  <a:spcPts val="0"/>
-                </a:spcAft>
-                <a:buNone/>
-              </a:pPr>
-              <a:r>
-                <a:rPr lang="en-US" sz="1650" b="0" i="0" u="none" strike="noStrike" cap="none" dirty="0">
-                  <a:solidFill>
-                    <a:srgbClr val="FFFFFF"/>
-                  </a:solidFill>
-                  <a:latin typeface="Poppins Light"/>
-                  <a:ea typeface="Poppins Light"/>
-                  <a:cs typeface="Poppins Light"/>
-                  <a:sym typeface="Poppins Light"/>
-                </a:rPr>
-                <a:t>Why it's new: India's first call-state + UPI-tripwire + evidence fusion</a:t>
-              </a:r>
-              <a:endParaRPr dirty="0"/>
-            </a:p>
-          </p:txBody>
-        </p:sp>
-        <p:pic>
-          <p:nvPicPr>
-            <p:cNvPr id="114" name="Google Shape;108;p14_r24" descr="image.png"/>
-            <p:cNvPicPr preferRelativeResize="0"/>
-            <p:nvPr/>
-          </p:nvPicPr>
-          <p:blipFill rotWithShape="1">
-            <a:blip r:embed="rId5">
-              <a:alphaModFix/>
-            </a:blip>
-            <a:srcRect/>
-            <a:stretch/>
-          </p:blipFill>
-          <p:spPr>
-            <a:xfrm>
-              <a:off x="571500" y="4791075"/>
-              <a:ext cx="200025" cy="247650"/>
-            </a:xfrm>
-            <a:prstGeom prst="rect">
-              <a:avLst/>
-            </a:prstGeom>
-            <a:noFill/>
-            <a:ln>
-              <a:noFill/>
-            </a:ln>
-          </p:spPr>
-        </p:pic>
-      </p:grpSp>
-    </p:spTree>
-  </p:cSld>
-  <p:clrMapOvr>
-    <a:masterClrMapping/>
-  </p:clrMapOvr>
-</p:sld>
-</file>
-
-<file path=ppt/slides/slide4.xml><?xml version="1.0" encoding="utf-8"?>
+<file path=ppt/slides/slide5.xml><?xml version="1.0" encoding="utf-8"?>
 <p:sld xmlns:a="http://schemas.openxmlformats.org/drawingml/2006/main" xmlns:r="http://schemas.openxmlformats.org/officeDocument/2006/relationships" xmlns:p="http://schemas.openxmlformats.org/presentationml/2006/main">
   <p:cSld>
     <p:spTree>
@@ -14907,7 +14907,7 @@
 </p:sld>
 </file>
 
-<file path=ppt/slides/slide5.xml><?xml version="1.0" encoding="utf-8"?>
+<file path=ppt/slides/slide6.xml><?xml version="1.0" encoding="utf-8"?>
 <p:sld xmlns:a="http://schemas.openxmlformats.org/drawingml/2006/main" xmlns:r="http://schemas.openxmlformats.org/officeDocument/2006/relationships" xmlns:p="http://schemas.openxmlformats.org/presentationml/2006/main">
   <p:cSld>
     <p:spTree>
@@ -15216,7 +15216,7 @@
                 <a:cs typeface="Poppins Light"/>
                 <a:sym typeface="Poppins Light"/>
               </a:rPr>
-              <a:t>Trained + verified on GTX 1650 laptop GPU —</a:t>
+              <a:t>Trained + verified on GTX 1650 laptop GPU -</a:t>
             </a:r>
             <a:endParaRPr dirty="0"/>
           </a:p>
@@ -15356,7 +15356,7 @@
                 <a:cs typeface="Poppins Light"/>
                 <a:sym typeface="Poppins Light"/>
               </a:rPr>
-              <a:t>Consumer apps can't tap call audio —</a:t>
+              <a:t>Consumer apps can't tap call audio -</a:t>
             </a:r>
             <a:endParaRPr dirty="0"/>
           </a:p>
@@ -15679,7 +15679,7 @@
 </p:sld>
 </file>
 
-<file path=ppt/slides/slide6.xml><?xml version="1.0" encoding="utf-8"?>
+<file path=ppt/slides/slide7.xml><?xml version="1.0" encoding="utf-8"?>
 <p:sld xmlns:a="http://schemas.openxmlformats.org/drawingml/2006/main" xmlns:r="http://schemas.openxmlformats.org/officeDocument/2006/relationships" xmlns:p="http://schemas.openxmlformats.org/presentationml/2006/main">
   <p:cSld>
     <p:spTree>
@@ -15836,7 +15836,7 @@
                 <a:cs typeface="Poppins Light"/>
                 <a:sym typeface="Poppins Light"/>
               </a:rPr>
-              <a:t>Seconds-to-intervention vs minutes-to-loss —</a:t>
+              <a:t>Seconds-to-intervention vs minutes-to-loss -</a:t>
             </a:r>
             <a:endParaRPr dirty="0"/>
           </a:p>
@@ -16158,7 +16158,7 @@
 </p:sld>
 </file>
 
-<file path=ppt/slides/slide7.xml><?xml version="1.0" encoding="utf-8"?>
+<file path=ppt/slides/slide8.xml><?xml version="1.0" encoding="utf-8"?>
 <p:sld xmlns:a="http://schemas.openxmlformats.org/drawingml/2006/main" xmlns:r="http://schemas.openxmlformats.org/officeDocument/2006/relationships" xmlns:p="http://schemas.openxmlformats.org/presentationml/2006/main">
   <p:cSld>
     <p:spTree>
@@ -16403,7 +16403,7 @@
                   <a:cs typeface="Poppins Light"/>
                   <a:sym typeface="Poppins Light"/>
                 </a:rPr>
-                <a:t>PAUSE intervention UI + family challenge (B3) — the moat</a:t>
+                <a:t>PAUSE intervention UI + family challenge (B3) - the moat</a:t>
               </a:r>
               <a:endParaRPr dirty="0"/>
             </a:p>
@@ -16683,7 +16683,7 @@
                 <a:cs typeface="Playfair Display"/>
                 <a:sym typeface="Playfair Display"/>
               </a:rPr>
-              <a:t>WORKING PROTOTYPE — LIVE DEMO</a:t>
+              <a:t>WORKING PROTOTYPE - LIVE DEMO</a:t>
             </a:r>
             <a:endParaRPr dirty="0"/>
           </a:p>
@@ -16806,7 +16806,7 @@
 </p:sld>
 </file>
 
-<file path=ppt/slides/slide8.xml><?xml version="1.0" encoding="utf-8"?>
+<file path=ppt/slides/slide9.xml><?xml version="1.0" encoding="utf-8"?>
 <p:sld xmlns:a="http://schemas.openxmlformats.org/drawingml/2006/main" xmlns:r="http://schemas.openxmlformats.org/officeDocument/2006/relationships" xmlns:p="http://schemas.openxmlformats.org/presentationml/2006/main">
   <p:cSld>
     <p:spTree>
@@ -17218,7 +17218,7 @@
                   <a:srgbClr val="FFFFFF"/>
                 </a:solidFill>
               </a:rPr>
-              <a:t>1. RBI/2024-25/105 — voice/SMS fraud safeguards (Jan 2025) — rbi.org.in</a:t>
+              <a:t>1. RBI/2024-25/105 - voice/SMS fraud safeguards (Jan 2025) - rbi.org.in</a:t>
             </a:r>
           </a:p>
           <a:p>
@@ -17228,7 +17228,7 @@
                   <a:srgbClr val="FFFFFF"/>
                 </a:solidFill>
               </a:rPr>
-              <a:t>2. RBI Auth Directions 2025 — 2FA mandatory Apr 2026 — rbi.org.in</a:t>
+              <a:t>2. RBI Auth Directions 2025 - 2FA mandatory Apr 2026 - rbi.org.in</a:t>
             </a:r>
           </a:p>
           <a:p>
@@ -17238,7 +17238,7 @@
                   <a:srgbClr val="FFFFFF"/>
                 </a:solidFill>
               </a:rPr>
-              <a:t>3. CERT-In CIAD-2024-0060 — Deepfakes: threats &amp; countermeasures — cert-in.org.in</a:t>
+              <a:t>3. CERT-In CIAD-2024-0060 - Deepfakes: threats &amp; countermeasures - cert-in.org.in</a:t>
             </a:r>
           </a:p>
           <a:p>
@@ -17248,7 +17248,7 @@
                   <a:srgbClr val="FFFFFF"/>
                 </a:solidFill>
               </a:rPr>
-              <a:t>4. DoT FRI: 1000+ banks · ₹660 crore prevented (Dec 2025) — pib.gov.in</a:t>
+              <a:t>4. DoT FRI: 1000+ banks · ₹660 crore prevented (Dec 2025) - pib.gov.in</a:t>
             </a:r>
           </a:p>
           <a:p>
@@ -17258,7 +17258,7 @@
                   <a:srgbClr val="FFFFFF"/>
                 </a:solidFill>
               </a:rPr>
-              <a:t>5. ASVspoof 2021 LA + NASK real-fraud benchmark (WACV 2026) — zenodo.org</a:t>
+              <a:t>5. ASVspoof 2021 LA + NASK real-fraud benchmark (WACV 2026) - zenodo.org</a:t>
             </a:r>
           </a:p>
           <a:p>
@@ -17268,7 +17268,7 @@
                   <a:srgbClr val="FFFFFF"/>
                 </a:solidFill>
               </a:rPr>
-              <a:t>6. AASIST / faster-whisper — github.com/clovaai · openai.com</a:t>
+              <a:t>6. AASIST / faster-whisper - github.com/clovaai · openai.com</a:t>
             </a:r>
           </a:p>
         </p:txBody>
@@ -17301,7 +17301,7 @@
                   <a:srgbClr val="FFFFFF"/>
                 </a:solidFill>
               </a:rPr>
-              <a:t>Team: {{TEAM_NAMES}} · GenAI used for ideation/support only. Model training, evaluation and this submission's technical claims are our own work.</a:t>
+              <a:t>Team: Harsh Gounder (Team Lead), Ayush Kharwar, Sujal Shukla · GenAI used for ideation/support only. Model training, evaluation and this submission's technical claims are our own work.</a:t>
             </a:r>
           </a:p>
         </p:txBody>
